--- a/260418_add/supplefigure_260420/SuppFig_S06_ssGSEA_CMS.pptx
+++ b/260418_add/supplefigure_260420/SuppFig_S06_ssGSEA_CMS.pptx
@@ -3155,7 +3155,7 @@
                 </a:solidFill>
                 <a:latin typeface="Arial"/>
               </a:rPr>
-              <a:t>CMScaller CMS classification composition by response (pre-CRT RNA-seq; Fisher P as annotation)</a:t>
+              <a:t>CMScaller classification by response — with Guinney 2015 reference composition</a:t>
             </a:r>
           </a:p>
         </p:txBody>
@@ -3168,8 +3168,8 @@
         </p:nvCxnSpPr>
         <p:spPr>
           <a:xfrm>
-            <a:off x="2560320" y="5943600"/>
-            <a:ext cx="7315200" cy="0"/>
+            <a:off x="2286000" y="5760720"/>
+            <a:ext cx="7772400" cy="0"/>
           </a:xfrm>
           <a:prstGeom prst="line">
             <a:avLst/>
@@ -3204,8 +3204,8 @@
         </p:nvCxnSpPr>
         <p:spPr>
           <a:xfrm>
-            <a:off x="2560320" y="1188720"/>
-            <a:ext cx="0" cy="4754880"/>
+            <a:off x="2286000" y="1188720"/>
+            <a:ext cx="0" cy="4572000"/>
           </a:xfrm>
           <a:prstGeom prst="line">
             <a:avLst/>
@@ -3240,8 +3240,8 @@
         </p:nvCxnSpPr>
         <p:spPr>
           <a:xfrm>
-            <a:off x="9875520" y="1188720"/>
-            <a:ext cx="0" cy="4754880"/>
+            <a:off x="10058400" y="1188720"/>
+            <a:ext cx="0" cy="4572000"/>
           </a:xfrm>
           <a:prstGeom prst="line">
             <a:avLst/>
@@ -3276,8 +3276,8 @@
         </p:nvCxnSpPr>
         <p:spPr>
           <a:xfrm>
-            <a:off x="2560320" y="1188720"/>
-            <a:ext cx="7315200" cy="0"/>
+            <a:off x="2286000" y="1188720"/>
+            <a:ext cx="7772400" cy="0"/>
           </a:xfrm>
           <a:prstGeom prst="line">
             <a:avLst/>
@@ -3312,7 +3312,7 @@
         </p:nvCxnSpPr>
         <p:spPr>
           <a:xfrm>
-            <a:off x="2496312" y="5943600"/>
+            <a:off x="2221992" y="5760720"/>
             <a:ext cx="64008" cy="0"/>
           </a:xfrm>
           <a:prstGeom prst="line">
@@ -3348,7 +3348,7 @@
         </p:nvSpPr>
         <p:spPr>
           <a:xfrm>
-            <a:off x="2057400" y="5861304"/>
+            <a:off x="1783080" y="5678424"/>
             <a:ext cx="438912" cy="164592"/>
           </a:xfrm>
           <a:prstGeom prst="rect">
@@ -3384,7 +3384,7 @@
         </p:nvCxnSpPr>
         <p:spPr>
           <a:xfrm>
-            <a:off x="2496312" y="4754880"/>
+            <a:off x="2221992" y="4617720"/>
             <a:ext cx="64008" cy="0"/>
           </a:xfrm>
           <a:prstGeom prst="line">
@@ -3420,7 +3420,7 @@
         </p:nvSpPr>
         <p:spPr>
           <a:xfrm>
-            <a:off x="2057400" y="4672584"/>
+            <a:off x="1783080" y="4535424"/>
             <a:ext cx="438912" cy="164592"/>
           </a:xfrm>
           <a:prstGeom prst="rect">
@@ -3443,7 +3443,7 @@
                 </a:solidFill>
                 <a:latin typeface="Arial"/>
               </a:rPr>
-              <a:t>4</a:t>
+              <a:t>6</a:t>
             </a:r>
           </a:p>
         </p:txBody>
@@ -3456,7 +3456,7 @@
         </p:nvCxnSpPr>
         <p:spPr>
           <a:xfrm>
-            <a:off x="2496312" y="3566160"/>
+            <a:off x="2221992" y="3474720"/>
             <a:ext cx="64008" cy="0"/>
           </a:xfrm>
           <a:prstGeom prst="line">
@@ -3492,7 +3492,7 @@
         </p:nvSpPr>
         <p:spPr>
           <a:xfrm>
-            <a:off x="2057400" y="3483864"/>
+            <a:off x="1783080" y="3392424"/>
             <a:ext cx="438912" cy="164592"/>
           </a:xfrm>
           <a:prstGeom prst="rect">
@@ -3515,7 +3515,7 @@
                 </a:solidFill>
                 <a:latin typeface="Arial"/>
               </a:rPr>
-              <a:t>9</a:t>
+              <a:t>11</a:t>
             </a:r>
           </a:p>
         </p:txBody>
@@ -3528,7 +3528,7 @@
         </p:nvCxnSpPr>
         <p:spPr>
           <a:xfrm>
-            <a:off x="2496312" y="2377440"/>
+            <a:off x="2221992" y="2331720"/>
             <a:ext cx="64008" cy="0"/>
           </a:xfrm>
           <a:prstGeom prst="line">
@@ -3564,7 +3564,7 @@
         </p:nvSpPr>
         <p:spPr>
           <a:xfrm>
-            <a:off x="2057400" y="2295144"/>
+            <a:off x="1783080" y="2249424"/>
             <a:ext cx="438912" cy="164592"/>
           </a:xfrm>
           <a:prstGeom prst="rect">
@@ -3587,7 +3587,7 @@
                 </a:solidFill>
                 <a:latin typeface="Arial"/>
               </a:rPr>
-              <a:t>13</a:t>
+              <a:t>16</a:t>
             </a:r>
           </a:p>
         </p:txBody>
@@ -3600,7 +3600,7 @@
         </p:nvCxnSpPr>
         <p:spPr>
           <a:xfrm>
-            <a:off x="2496312" y="1188720"/>
+            <a:off x="2221992" y="1188720"/>
             <a:ext cx="64008" cy="0"/>
           </a:xfrm>
           <a:prstGeom prst="line">
@@ -3636,7 +3636,7 @@
         </p:nvSpPr>
         <p:spPr>
           <a:xfrm>
-            <a:off x="2057400" y="1106424"/>
+            <a:off x="1783080" y="1106424"/>
             <a:ext cx="438912" cy="164592"/>
           </a:xfrm>
           <a:prstGeom prst="rect">
@@ -3659,7 +3659,7 @@
                 </a:solidFill>
                 <a:latin typeface="Arial"/>
               </a:rPr>
-              <a:t>18</a:t>
+              <a:t>22</a:t>
             </a:r>
           </a:p>
         </p:txBody>
@@ -3672,7 +3672,7 @@
         </p:nvSpPr>
         <p:spPr>
           <a:xfrm>
-            <a:off x="1691640" y="2560320"/>
+            <a:off x="1417320" y="2468880"/>
             <a:ext cx="365760" cy="2011680"/>
           </a:xfrm>
           <a:prstGeom prst="rect">
@@ -3708,8 +3708,8 @@
         </p:nvSpPr>
         <p:spPr>
           <a:xfrm>
-            <a:off x="4450080" y="5673436"/>
-            <a:ext cx="1097280" cy="270164"/>
+            <a:off x="2809702" y="5552902"/>
+            <a:ext cx="1097280" cy="207818"/>
           </a:xfrm>
           <a:prstGeom prst="rect">
             <a:avLst/>
@@ -3754,7 +3754,7 @@
         </p:nvSpPr>
         <p:spPr>
           <a:xfrm>
-            <a:off x="4450080" y="5717078"/>
+            <a:off x="2809702" y="5565371"/>
             <a:ext cx="1097280" cy="182880"/>
           </a:xfrm>
           <a:prstGeom prst="rect">
@@ -3771,7 +3771,7 @@
           <a:p>
             <a:pPr algn="ctr"/>
             <a:r>
-              <a:rPr sz="900" b="1" i="0">
+              <a:rPr sz="1000" b="1" i="0">
                 <a:solidFill>
                   <a:srgbClr val="FFFFFF"/>
                 </a:solidFill>
@@ -3790,8 +3790,8 @@
         </p:nvSpPr>
         <p:spPr>
           <a:xfrm>
-            <a:off x="4450080" y="4052455"/>
-            <a:ext cx="1097280" cy="1620982"/>
+            <a:off x="2809702" y="4305993"/>
+            <a:ext cx="1097280" cy="1246909"/>
           </a:xfrm>
           <a:prstGeom prst="rect">
             <a:avLst/>
@@ -3836,7 +3836,7 @@
         </p:nvSpPr>
         <p:spPr>
           <a:xfrm>
-            <a:off x="4450080" y="4771505"/>
+            <a:off x="2809702" y="4838007"/>
             <a:ext cx="1097280" cy="182880"/>
           </a:xfrm>
           <a:prstGeom prst="rect">
@@ -3853,7 +3853,7 @@
           <a:p>
             <a:pPr algn="ctr"/>
             <a:r>
-              <a:rPr sz="900" b="1" i="0">
+              <a:rPr sz="1000" b="1" i="0">
                 <a:solidFill>
                   <a:srgbClr val="FFFFFF"/>
                 </a:solidFill>
@@ -3872,8 +3872,8 @@
         </p:nvSpPr>
         <p:spPr>
           <a:xfrm>
-            <a:off x="4450080" y="2971800"/>
-            <a:ext cx="1097280" cy="1080655"/>
+            <a:off x="2809702" y="3474720"/>
+            <a:ext cx="1097280" cy="831273"/>
           </a:xfrm>
           <a:prstGeom prst="rect">
             <a:avLst/>
@@ -3918,7 +3918,7 @@
         </p:nvSpPr>
         <p:spPr>
           <a:xfrm>
-            <a:off x="4450080" y="3420687"/>
+            <a:off x="2809702" y="3798916"/>
             <a:ext cx="1097280" cy="182880"/>
           </a:xfrm>
           <a:prstGeom prst="rect">
@@ -3935,7 +3935,7 @@
           <a:p>
             <a:pPr algn="ctr"/>
             <a:r>
-              <a:rPr sz="900" b="1" i="0">
+              <a:rPr sz="1000" b="1" i="0">
                 <a:solidFill>
                   <a:srgbClr val="FFFFFF"/>
                 </a:solidFill>
@@ -3954,8 +3954,8 @@
         </p:nvSpPr>
         <p:spPr>
           <a:xfrm>
-            <a:off x="4450080" y="2161309"/>
-            <a:ext cx="1097280" cy="810491"/>
+            <a:off x="2809702" y="2851265"/>
+            <a:ext cx="1097280" cy="623455"/>
           </a:xfrm>
           <a:prstGeom prst="rect">
             <a:avLst/>
@@ -4000,7 +4000,7 @@
         </p:nvSpPr>
         <p:spPr>
           <a:xfrm>
-            <a:off x="4450080" y="2475115"/>
+            <a:off x="2809702" y="3071553"/>
             <a:ext cx="1097280" cy="182880"/>
           </a:xfrm>
           <a:prstGeom prst="rect">
@@ -4017,7 +4017,7 @@
           <a:p>
             <a:pPr algn="ctr"/>
             <a:r>
-              <a:rPr sz="900" b="1" i="0">
+              <a:rPr sz="1000" b="1" i="0">
                 <a:solidFill>
                   <a:srgbClr val="FFFFFF"/>
                 </a:solidFill>
@@ -4036,7 +4036,7 @@
         </p:nvSpPr>
         <p:spPr>
           <a:xfrm>
-            <a:off x="4450080" y="6016752"/>
+            <a:off x="2809702" y="5833872"/>
             <a:ext cx="1097280" cy="228600"/>
           </a:xfrm>
           <a:prstGeom prst="rect">
@@ -4046,7 +4046,7 @@
           <a:effectLst/>
         </p:spPr>
         <p:txBody>
-          <a:bodyPr wrap="square" lIns="0" rIns="0" tIns="0" bIns="0" anchor="ctr">
+          <a:bodyPr wrap="square" lIns="0" rIns="0" tIns="0" bIns="0" anchor="t">
             <a:spAutoFit/>
           </a:bodyPr>
           <a:lstStyle/>
@@ -4072,8 +4072,8 @@
         </p:nvSpPr>
         <p:spPr>
           <a:xfrm>
-            <a:off x="6888480" y="5403273"/>
-            <a:ext cx="1097280" cy="540327"/>
+            <a:off x="5164975" y="5345084"/>
+            <a:ext cx="1097280" cy="415636"/>
           </a:xfrm>
           <a:prstGeom prst="rect">
             <a:avLst/>
@@ -4118,7 +4118,7 @@
         </p:nvSpPr>
         <p:spPr>
           <a:xfrm>
-            <a:off x="6888480" y="5581996"/>
+            <a:off x="5164975" y="5461462"/>
             <a:ext cx="1097280" cy="182880"/>
           </a:xfrm>
           <a:prstGeom prst="rect">
@@ -4135,7 +4135,7 @@
           <a:p>
             <a:pPr algn="ctr"/>
             <a:r>
-              <a:rPr sz="900" b="1" i="0">
+              <a:rPr sz="1000" b="1" i="0">
                 <a:solidFill>
                   <a:srgbClr val="FFFFFF"/>
                 </a:solidFill>
@@ -4154,8 +4154,8 @@
         </p:nvSpPr>
         <p:spPr>
           <a:xfrm>
-            <a:off x="6888480" y="4052455"/>
-            <a:ext cx="1097280" cy="1350818"/>
+            <a:off x="5164975" y="4305993"/>
+            <a:ext cx="1097280" cy="1039091"/>
           </a:xfrm>
           <a:prstGeom prst="rect">
             <a:avLst/>
@@ -4200,7 +4200,7 @@
         </p:nvSpPr>
         <p:spPr>
           <a:xfrm>
-            <a:off x="6888480" y="4636424"/>
+            <a:off x="5164975" y="4734098"/>
             <a:ext cx="1097280" cy="182880"/>
           </a:xfrm>
           <a:prstGeom prst="rect">
@@ -4217,7 +4217,7 @@
           <a:p>
             <a:pPr algn="ctr"/>
             <a:r>
-              <a:rPr sz="900" b="1" i="0">
+              <a:rPr sz="1000" b="1" i="0">
                 <a:solidFill>
                   <a:srgbClr val="FFFFFF"/>
                 </a:solidFill>
@@ -4236,8 +4236,8 @@
         </p:nvSpPr>
         <p:spPr>
           <a:xfrm>
-            <a:off x="6888480" y="2701636"/>
-            <a:ext cx="1097280" cy="1350818"/>
+            <a:off x="5164975" y="3266902"/>
+            <a:ext cx="1097280" cy="1039091"/>
           </a:xfrm>
           <a:prstGeom prst="rect">
             <a:avLst/>
@@ -4282,7 +4282,7 @@
         </p:nvSpPr>
         <p:spPr>
           <a:xfrm>
-            <a:off x="6888480" y="3285605"/>
+            <a:off x="5164975" y="3695007"/>
             <a:ext cx="1097280" cy="182880"/>
           </a:xfrm>
           <a:prstGeom prst="rect">
@@ -4299,7 +4299,7 @@
           <a:p>
             <a:pPr algn="ctr"/>
             <a:r>
-              <a:rPr sz="900" b="1" i="0">
+              <a:rPr sz="1000" b="1" i="0">
                 <a:solidFill>
                   <a:srgbClr val="FFFFFF"/>
                 </a:solidFill>
@@ -4318,8 +4318,8 @@
         </p:nvSpPr>
         <p:spPr>
           <a:xfrm>
-            <a:off x="6888480" y="1620982"/>
-            <a:ext cx="1097280" cy="1080655"/>
+            <a:off x="5164975" y="2435629"/>
+            <a:ext cx="1097280" cy="831273"/>
           </a:xfrm>
           <a:prstGeom prst="rect">
             <a:avLst/>
@@ -4364,7 +4364,7 @@
         </p:nvSpPr>
         <p:spPr>
           <a:xfrm>
-            <a:off x="6888480" y="2069869"/>
+            <a:off x="5164975" y="2759825"/>
             <a:ext cx="1097280" cy="182880"/>
           </a:xfrm>
           <a:prstGeom prst="rect">
@@ -4381,7 +4381,7 @@
           <a:p>
             <a:pPr algn="ctr"/>
             <a:r>
-              <a:rPr sz="900" b="1" i="0">
+              <a:rPr sz="1000" b="1" i="0">
                 <a:solidFill>
                   <a:srgbClr val="FFFFFF"/>
                 </a:solidFill>
@@ -4400,7 +4400,7 @@
         </p:nvSpPr>
         <p:spPr>
           <a:xfrm>
-            <a:off x="6888480" y="6016752"/>
+            <a:off x="5164975" y="5833872"/>
             <a:ext cx="1097280" cy="228600"/>
           </a:xfrm>
           <a:prstGeom prst="rect">
@@ -4410,7 +4410,7 @@
           <a:effectLst/>
         </p:spPr>
         <p:txBody>
-          <a:bodyPr wrap="square" lIns="0" rIns="0" tIns="0" bIns="0" anchor="ctr">
+          <a:bodyPr wrap="square" lIns="0" rIns="0" tIns="0" bIns="0" anchor="t">
             <a:spAutoFit/>
           </a:bodyPr>
           <a:lstStyle/>
@@ -4430,13 +4430,2422 @@
       </p:sp>
       <p:sp>
         <p:nvSpPr>
-          <p:cNvPr id="37" name="TextBox 36"/>
+          <p:cNvPr id="37" name="Rectangle 36"/>
+          <p:cNvSpPr/>
+          <p:nvPr/>
+        </p:nvSpPr>
+        <p:spPr>
+          <a:xfrm>
+            <a:off x="7520247" y="4887884"/>
+            <a:ext cx="1097280" cy="872836"/>
+          </a:xfrm>
+          <a:prstGeom prst="rect">
+            <a:avLst/>
+          </a:prstGeom>
+          <a:solidFill>
+            <a:srgbClr val="E4944E"/>
+          </a:solidFill>
+          <a:ln>
+            <a:noFill/>
+          </a:ln>
+          <a:effectLst/>
+        </p:spPr>
+        <p:style>
+          <a:lnRef idx="1">
+            <a:schemeClr val="accent1"/>
+          </a:lnRef>
+          <a:fillRef idx="3">
+            <a:schemeClr val="accent1"/>
+          </a:fillRef>
+          <a:effectRef idx="2">
+            <a:schemeClr val="accent1"/>
+          </a:effectRef>
+          <a:fontRef idx="minor">
+            <a:schemeClr val="lt1"/>
+          </a:fontRef>
+        </p:style>
+        <p:txBody>
+          <a:bodyPr rtlCol="0" anchor="ctr"/>
+          <a:lstStyle/>
+          <a:p>
+            <a:pPr algn="ctr"/>
+          </a:p>
+        </p:txBody>
+      </p:sp>
+      <p:cxnSp>
+        <p:nvCxnSpPr>
+          <p:cNvPr id="38" name="Connector 37"/>
+          <p:cNvCxnSpPr/>
+          <p:nvPr/>
+        </p:nvCxnSpPr>
+        <p:spPr>
+          <a:xfrm>
+            <a:off x="7520247" y="4887884"/>
+            <a:ext cx="1097280" cy="0"/>
+          </a:xfrm>
+          <a:prstGeom prst="line">
+            <a:avLst/>
+          </a:prstGeom>
+          <a:ln w="5080">
+            <a:solidFill>
+              <a:srgbClr val="FFFFFF"/>
+            </a:solidFill>
+          </a:ln>
+          <a:effectLst/>
+        </p:spPr>
+        <p:style>
+          <a:lnRef idx="2">
+            <a:schemeClr val="accent1"/>
+          </a:lnRef>
+          <a:fillRef idx="0">
+            <a:schemeClr val="accent1"/>
+          </a:fillRef>
+          <a:effectRef idx="1">
+            <a:schemeClr val="accent1"/>
+          </a:effectRef>
+          <a:fontRef idx="minor">
+            <a:schemeClr val="tx1"/>
+          </a:fontRef>
+        </p:style>
+      </p:cxnSp>
+      <p:cxnSp>
+        <p:nvCxnSpPr>
+          <p:cNvPr id="39" name="Connector 38"/>
+          <p:cNvCxnSpPr/>
+          <p:nvPr/>
+        </p:nvCxnSpPr>
+        <p:spPr>
+          <a:xfrm>
+            <a:off x="7520247" y="4979324"/>
+            <a:ext cx="1097280" cy="0"/>
+          </a:xfrm>
+          <a:prstGeom prst="line">
+            <a:avLst/>
+          </a:prstGeom>
+          <a:ln w="5080">
+            <a:solidFill>
+              <a:srgbClr val="FFFFFF"/>
+            </a:solidFill>
+          </a:ln>
+          <a:effectLst/>
+        </p:spPr>
+        <p:style>
+          <a:lnRef idx="2">
+            <a:schemeClr val="accent1"/>
+          </a:lnRef>
+          <a:fillRef idx="0">
+            <a:schemeClr val="accent1"/>
+          </a:fillRef>
+          <a:effectRef idx="1">
+            <a:schemeClr val="accent1"/>
+          </a:effectRef>
+          <a:fontRef idx="minor">
+            <a:schemeClr val="tx1"/>
+          </a:fontRef>
+        </p:style>
+      </p:cxnSp>
+      <p:cxnSp>
+        <p:nvCxnSpPr>
+          <p:cNvPr id="40" name="Connector 39"/>
+          <p:cNvCxnSpPr/>
+          <p:nvPr/>
+        </p:nvCxnSpPr>
+        <p:spPr>
+          <a:xfrm>
+            <a:off x="7520247" y="5070764"/>
+            <a:ext cx="1097280" cy="0"/>
+          </a:xfrm>
+          <a:prstGeom prst="line">
+            <a:avLst/>
+          </a:prstGeom>
+          <a:ln w="5080">
+            <a:solidFill>
+              <a:srgbClr val="FFFFFF"/>
+            </a:solidFill>
+          </a:ln>
+          <a:effectLst/>
+        </p:spPr>
+        <p:style>
+          <a:lnRef idx="2">
+            <a:schemeClr val="accent1"/>
+          </a:lnRef>
+          <a:fillRef idx="0">
+            <a:schemeClr val="accent1"/>
+          </a:fillRef>
+          <a:effectRef idx="1">
+            <a:schemeClr val="accent1"/>
+          </a:effectRef>
+          <a:fontRef idx="minor">
+            <a:schemeClr val="tx1"/>
+          </a:fontRef>
+        </p:style>
+      </p:cxnSp>
+      <p:cxnSp>
+        <p:nvCxnSpPr>
+          <p:cNvPr id="41" name="Connector 40"/>
+          <p:cNvCxnSpPr/>
+          <p:nvPr/>
+        </p:nvCxnSpPr>
+        <p:spPr>
+          <a:xfrm>
+            <a:off x="7520247" y="5162204"/>
+            <a:ext cx="1097280" cy="0"/>
+          </a:xfrm>
+          <a:prstGeom prst="line">
+            <a:avLst/>
+          </a:prstGeom>
+          <a:ln w="5080">
+            <a:solidFill>
+              <a:srgbClr val="FFFFFF"/>
+            </a:solidFill>
+          </a:ln>
+          <a:effectLst/>
+        </p:spPr>
+        <p:style>
+          <a:lnRef idx="2">
+            <a:schemeClr val="accent1"/>
+          </a:lnRef>
+          <a:fillRef idx="0">
+            <a:schemeClr val="accent1"/>
+          </a:fillRef>
+          <a:effectRef idx="1">
+            <a:schemeClr val="accent1"/>
+          </a:effectRef>
+          <a:fontRef idx="minor">
+            <a:schemeClr val="tx1"/>
+          </a:fontRef>
+        </p:style>
+      </p:cxnSp>
+      <p:cxnSp>
+        <p:nvCxnSpPr>
+          <p:cNvPr id="42" name="Connector 41"/>
+          <p:cNvCxnSpPr/>
+          <p:nvPr/>
+        </p:nvCxnSpPr>
+        <p:spPr>
+          <a:xfrm>
+            <a:off x="7520247" y="5253644"/>
+            <a:ext cx="1097280" cy="0"/>
+          </a:xfrm>
+          <a:prstGeom prst="line">
+            <a:avLst/>
+          </a:prstGeom>
+          <a:ln w="5080">
+            <a:solidFill>
+              <a:srgbClr val="FFFFFF"/>
+            </a:solidFill>
+          </a:ln>
+          <a:effectLst/>
+        </p:spPr>
+        <p:style>
+          <a:lnRef idx="2">
+            <a:schemeClr val="accent1"/>
+          </a:lnRef>
+          <a:fillRef idx="0">
+            <a:schemeClr val="accent1"/>
+          </a:fillRef>
+          <a:effectRef idx="1">
+            <a:schemeClr val="accent1"/>
+          </a:effectRef>
+          <a:fontRef idx="minor">
+            <a:schemeClr val="tx1"/>
+          </a:fontRef>
+        </p:style>
+      </p:cxnSp>
+      <p:cxnSp>
+        <p:nvCxnSpPr>
+          <p:cNvPr id="43" name="Connector 42"/>
+          <p:cNvCxnSpPr/>
+          <p:nvPr/>
+        </p:nvCxnSpPr>
+        <p:spPr>
+          <a:xfrm>
+            <a:off x="7520247" y="5345084"/>
+            <a:ext cx="1097280" cy="0"/>
+          </a:xfrm>
+          <a:prstGeom prst="line">
+            <a:avLst/>
+          </a:prstGeom>
+          <a:ln w="5080">
+            <a:solidFill>
+              <a:srgbClr val="FFFFFF"/>
+            </a:solidFill>
+          </a:ln>
+          <a:effectLst/>
+        </p:spPr>
+        <p:style>
+          <a:lnRef idx="2">
+            <a:schemeClr val="accent1"/>
+          </a:lnRef>
+          <a:fillRef idx="0">
+            <a:schemeClr val="accent1"/>
+          </a:fillRef>
+          <a:effectRef idx="1">
+            <a:schemeClr val="accent1"/>
+          </a:effectRef>
+          <a:fontRef idx="minor">
+            <a:schemeClr val="tx1"/>
+          </a:fontRef>
+        </p:style>
+      </p:cxnSp>
+      <p:cxnSp>
+        <p:nvCxnSpPr>
+          <p:cNvPr id="44" name="Connector 43"/>
+          <p:cNvCxnSpPr/>
+          <p:nvPr/>
+        </p:nvCxnSpPr>
+        <p:spPr>
+          <a:xfrm>
+            <a:off x="7520247" y="5436524"/>
+            <a:ext cx="1097280" cy="0"/>
+          </a:xfrm>
+          <a:prstGeom prst="line">
+            <a:avLst/>
+          </a:prstGeom>
+          <a:ln w="5080">
+            <a:solidFill>
+              <a:srgbClr val="FFFFFF"/>
+            </a:solidFill>
+          </a:ln>
+          <a:effectLst/>
+        </p:spPr>
+        <p:style>
+          <a:lnRef idx="2">
+            <a:schemeClr val="accent1"/>
+          </a:lnRef>
+          <a:fillRef idx="0">
+            <a:schemeClr val="accent1"/>
+          </a:fillRef>
+          <a:effectRef idx="1">
+            <a:schemeClr val="accent1"/>
+          </a:effectRef>
+          <a:fontRef idx="minor">
+            <a:schemeClr val="tx1"/>
+          </a:fontRef>
+        </p:style>
+      </p:cxnSp>
+      <p:cxnSp>
+        <p:nvCxnSpPr>
+          <p:cNvPr id="45" name="Connector 44"/>
+          <p:cNvCxnSpPr/>
+          <p:nvPr/>
+        </p:nvCxnSpPr>
+        <p:spPr>
+          <a:xfrm>
+            <a:off x="7520247" y="5527964"/>
+            <a:ext cx="1097280" cy="0"/>
+          </a:xfrm>
+          <a:prstGeom prst="line">
+            <a:avLst/>
+          </a:prstGeom>
+          <a:ln w="5080">
+            <a:solidFill>
+              <a:srgbClr val="FFFFFF"/>
+            </a:solidFill>
+          </a:ln>
+          <a:effectLst/>
+        </p:spPr>
+        <p:style>
+          <a:lnRef idx="2">
+            <a:schemeClr val="accent1"/>
+          </a:lnRef>
+          <a:fillRef idx="0">
+            <a:schemeClr val="accent1"/>
+          </a:fillRef>
+          <a:effectRef idx="1">
+            <a:schemeClr val="accent1"/>
+          </a:effectRef>
+          <a:fontRef idx="minor">
+            <a:schemeClr val="tx1"/>
+          </a:fontRef>
+        </p:style>
+      </p:cxnSp>
+      <p:cxnSp>
+        <p:nvCxnSpPr>
+          <p:cNvPr id="46" name="Connector 45"/>
+          <p:cNvCxnSpPr/>
+          <p:nvPr/>
+        </p:nvCxnSpPr>
+        <p:spPr>
+          <a:xfrm>
+            <a:off x="7520247" y="5619404"/>
+            <a:ext cx="1097280" cy="0"/>
+          </a:xfrm>
+          <a:prstGeom prst="line">
+            <a:avLst/>
+          </a:prstGeom>
+          <a:ln w="5080">
+            <a:solidFill>
+              <a:srgbClr val="FFFFFF"/>
+            </a:solidFill>
+          </a:ln>
+          <a:effectLst/>
+        </p:spPr>
+        <p:style>
+          <a:lnRef idx="2">
+            <a:schemeClr val="accent1"/>
+          </a:lnRef>
+          <a:fillRef idx="0">
+            <a:schemeClr val="accent1"/>
+          </a:fillRef>
+          <a:effectRef idx="1">
+            <a:schemeClr val="accent1"/>
+          </a:effectRef>
+          <a:fontRef idx="minor">
+            <a:schemeClr val="tx1"/>
+          </a:fontRef>
+        </p:style>
+      </p:cxnSp>
+      <p:cxnSp>
+        <p:nvCxnSpPr>
+          <p:cNvPr id="47" name="Connector 46"/>
+          <p:cNvCxnSpPr/>
+          <p:nvPr/>
+        </p:nvCxnSpPr>
+        <p:spPr>
+          <a:xfrm>
+            <a:off x="7520247" y="5710844"/>
+            <a:ext cx="1097280" cy="0"/>
+          </a:xfrm>
+          <a:prstGeom prst="line">
+            <a:avLst/>
+          </a:prstGeom>
+          <a:ln w="5080">
+            <a:solidFill>
+              <a:srgbClr val="FFFFFF"/>
+            </a:solidFill>
+          </a:ln>
+          <a:effectLst/>
+        </p:spPr>
+        <p:style>
+          <a:lnRef idx="2">
+            <a:schemeClr val="accent1"/>
+          </a:lnRef>
+          <a:fillRef idx="0">
+            <a:schemeClr val="accent1"/>
+          </a:fillRef>
+          <a:effectRef idx="1">
+            <a:schemeClr val="accent1"/>
+          </a:effectRef>
+          <a:fontRef idx="minor">
+            <a:schemeClr val="tx1"/>
+          </a:fontRef>
+        </p:style>
+      </p:cxnSp>
+      <p:sp>
+        <p:nvSpPr>
+          <p:cNvPr id="48" name="Rectangle 47"/>
+          <p:cNvSpPr/>
+          <p:nvPr/>
+        </p:nvSpPr>
+        <p:spPr>
+          <a:xfrm>
+            <a:off x="7520247" y="2581102"/>
+            <a:ext cx="1097280" cy="2306782"/>
+          </a:xfrm>
+          <a:prstGeom prst="rect">
+            <a:avLst/>
+          </a:prstGeom>
+          <a:solidFill>
+            <a:srgbClr val="5A83B3"/>
+          </a:solidFill>
+          <a:ln>
+            <a:noFill/>
+          </a:ln>
+          <a:effectLst/>
+        </p:spPr>
+        <p:style>
+          <a:lnRef idx="1">
+            <a:schemeClr val="accent1"/>
+          </a:lnRef>
+          <a:fillRef idx="3">
+            <a:schemeClr val="accent1"/>
+          </a:fillRef>
+          <a:effectRef idx="2">
+            <a:schemeClr val="accent1"/>
+          </a:effectRef>
+          <a:fontRef idx="minor">
+            <a:schemeClr val="lt1"/>
+          </a:fontRef>
+        </p:style>
+        <p:txBody>
+          <a:bodyPr rtlCol="0" anchor="ctr"/>
+          <a:lstStyle/>
+          <a:p>
+            <a:pPr algn="ctr"/>
+          </a:p>
+        </p:txBody>
+      </p:sp>
+      <p:cxnSp>
+        <p:nvCxnSpPr>
+          <p:cNvPr id="49" name="Connector 48"/>
+          <p:cNvCxnSpPr/>
+          <p:nvPr/>
+        </p:nvCxnSpPr>
+        <p:spPr>
+          <a:xfrm>
+            <a:off x="7520247" y="2581102"/>
+            <a:ext cx="1097280" cy="0"/>
+          </a:xfrm>
+          <a:prstGeom prst="line">
+            <a:avLst/>
+          </a:prstGeom>
+          <a:ln w="5080">
+            <a:solidFill>
+              <a:srgbClr val="FFFFFF"/>
+            </a:solidFill>
+          </a:ln>
+          <a:effectLst/>
+        </p:spPr>
+        <p:style>
+          <a:lnRef idx="2">
+            <a:schemeClr val="accent1"/>
+          </a:lnRef>
+          <a:fillRef idx="0">
+            <a:schemeClr val="accent1"/>
+          </a:fillRef>
+          <a:effectRef idx="1">
+            <a:schemeClr val="accent1"/>
+          </a:effectRef>
+          <a:fontRef idx="minor">
+            <a:schemeClr val="tx1"/>
+          </a:fontRef>
+        </p:style>
+      </p:cxnSp>
+      <p:cxnSp>
+        <p:nvCxnSpPr>
+          <p:cNvPr id="50" name="Connector 49"/>
+          <p:cNvCxnSpPr/>
+          <p:nvPr/>
+        </p:nvCxnSpPr>
+        <p:spPr>
+          <a:xfrm>
+            <a:off x="7520247" y="2672542"/>
+            <a:ext cx="1097280" cy="0"/>
+          </a:xfrm>
+          <a:prstGeom prst="line">
+            <a:avLst/>
+          </a:prstGeom>
+          <a:ln w="5080">
+            <a:solidFill>
+              <a:srgbClr val="FFFFFF"/>
+            </a:solidFill>
+          </a:ln>
+          <a:effectLst/>
+        </p:spPr>
+        <p:style>
+          <a:lnRef idx="2">
+            <a:schemeClr val="accent1"/>
+          </a:lnRef>
+          <a:fillRef idx="0">
+            <a:schemeClr val="accent1"/>
+          </a:fillRef>
+          <a:effectRef idx="1">
+            <a:schemeClr val="accent1"/>
+          </a:effectRef>
+          <a:fontRef idx="minor">
+            <a:schemeClr val="tx1"/>
+          </a:fontRef>
+        </p:style>
+      </p:cxnSp>
+      <p:cxnSp>
+        <p:nvCxnSpPr>
+          <p:cNvPr id="51" name="Connector 50"/>
+          <p:cNvCxnSpPr/>
+          <p:nvPr/>
+        </p:nvCxnSpPr>
+        <p:spPr>
+          <a:xfrm>
+            <a:off x="7520247" y="2763982"/>
+            <a:ext cx="1097280" cy="0"/>
+          </a:xfrm>
+          <a:prstGeom prst="line">
+            <a:avLst/>
+          </a:prstGeom>
+          <a:ln w="5080">
+            <a:solidFill>
+              <a:srgbClr val="FFFFFF"/>
+            </a:solidFill>
+          </a:ln>
+          <a:effectLst/>
+        </p:spPr>
+        <p:style>
+          <a:lnRef idx="2">
+            <a:schemeClr val="accent1"/>
+          </a:lnRef>
+          <a:fillRef idx="0">
+            <a:schemeClr val="accent1"/>
+          </a:fillRef>
+          <a:effectRef idx="1">
+            <a:schemeClr val="accent1"/>
+          </a:effectRef>
+          <a:fontRef idx="minor">
+            <a:schemeClr val="tx1"/>
+          </a:fontRef>
+        </p:style>
+      </p:cxnSp>
+      <p:cxnSp>
+        <p:nvCxnSpPr>
+          <p:cNvPr id="52" name="Connector 51"/>
+          <p:cNvCxnSpPr/>
+          <p:nvPr/>
+        </p:nvCxnSpPr>
+        <p:spPr>
+          <a:xfrm>
+            <a:off x="7520247" y="2855422"/>
+            <a:ext cx="1097280" cy="0"/>
+          </a:xfrm>
+          <a:prstGeom prst="line">
+            <a:avLst/>
+          </a:prstGeom>
+          <a:ln w="5080">
+            <a:solidFill>
+              <a:srgbClr val="FFFFFF"/>
+            </a:solidFill>
+          </a:ln>
+          <a:effectLst/>
+        </p:spPr>
+        <p:style>
+          <a:lnRef idx="2">
+            <a:schemeClr val="accent1"/>
+          </a:lnRef>
+          <a:fillRef idx="0">
+            <a:schemeClr val="accent1"/>
+          </a:fillRef>
+          <a:effectRef idx="1">
+            <a:schemeClr val="accent1"/>
+          </a:effectRef>
+          <a:fontRef idx="minor">
+            <a:schemeClr val="tx1"/>
+          </a:fontRef>
+        </p:style>
+      </p:cxnSp>
+      <p:cxnSp>
+        <p:nvCxnSpPr>
+          <p:cNvPr id="53" name="Connector 52"/>
+          <p:cNvCxnSpPr/>
+          <p:nvPr/>
+        </p:nvCxnSpPr>
+        <p:spPr>
+          <a:xfrm>
+            <a:off x="7520247" y="2946862"/>
+            <a:ext cx="1097280" cy="0"/>
+          </a:xfrm>
+          <a:prstGeom prst="line">
+            <a:avLst/>
+          </a:prstGeom>
+          <a:ln w="5080">
+            <a:solidFill>
+              <a:srgbClr val="FFFFFF"/>
+            </a:solidFill>
+          </a:ln>
+          <a:effectLst/>
+        </p:spPr>
+        <p:style>
+          <a:lnRef idx="2">
+            <a:schemeClr val="accent1"/>
+          </a:lnRef>
+          <a:fillRef idx="0">
+            <a:schemeClr val="accent1"/>
+          </a:fillRef>
+          <a:effectRef idx="1">
+            <a:schemeClr val="accent1"/>
+          </a:effectRef>
+          <a:fontRef idx="minor">
+            <a:schemeClr val="tx1"/>
+          </a:fontRef>
+        </p:style>
+      </p:cxnSp>
+      <p:cxnSp>
+        <p:nvCxnSpPr>
+          <p:cNvPr id="54" name="Connector 53"/>
+          <p:cNvCxnSpPr/>
+          <p:nvPr/>
+        </p:nvCxnSpPr>
+        <p:spPr>
+          <a:xfrm>
+            <a:off x="7520247" y="3038302"/>
+            <a:ext cx="1097280" cy="0"/>
+          </a:xfrm>
+          <a:prstGeom prst="line">
+            <a:avLst/>
+          </a:prstGeom>
+          <a:ln w="5080">
+            <a:solidFill>
+              <a:srgbClr val="FFFFFF"/>
+            </a:solidFill>
+          </a:ln>
+          <a:effectLst/>
+        </p:spPr>
+        <p:style>
+          <a:lnRef idx="2">
+            <a:schemeClr val="accent1"/>
+          </a:lnRef>
+          <a:fillRef idx="0">
+            <a:schemeClr val="accent1"/>
+          </a:fillRef>
+          <a:effectRef idx="1">
+            <a:schemeClr val="accent1"/>
+          </a:effectRef>
+          <a:fontRef idx="minor">
+            <a:schemeClr val="tx1"/>
+          </a:fontRef>
+        </p:style>
+      </p:cxnSp>
+      <p:cxnSp>
+        <p:nvCxnSpPr>
+          <p:cNvPr id="55" name="Connector 54"/>
+          <p:cNvCxnSpPr/>
+          <p:nvPr/>
+        </p:nvCxnSpPr>
+        <p:spPr>
+          <a:xfrm>
+            <a:off x="7520247" y="3129742"/>
+            <a:ext cx="1097280" cy="0"/>
+          </a:xfrm>
+          <a:prstGeom prst="line">
+            <a:avLst/>
+          </a:prstGeom>
+          <a:ln w="5080">
+            <a:solidFill>
+              <a:srgbClr val="FFFFFF"/>
+            </a:solidFill>
+          </a:ln>
+          <a:effectLst/>
+        </p:spPr>
+        <p:style>
+          <a:lnRef idx="2">
+            <a:schemeClr val="accent1"/>
+          </a:lnRef>
+          <a:fillRef idx="0">
+            <a:schemeClr val="accent1"/>
+          </a:fillRef>
+          <a:effectRef idx="1">
+            <a:schemeClr val="accent1"/>
+          </a:effectRef>
+          <a:fontRef idx="minor">
+            <a:schemeClr val="tx1"/>
+          </a:fontRef>
+        </p:style>
+      </p:cxnSp>
+      <p:cxnSp>
+        <p:nvCxnSpPr>
+          <p:cNvPr id="56" name="Connector 55"/>
+          <p:cNvCxnSpPr/>
+          <p:nvPr/>
+        </p:nvCxnSpPr>
+        <p:spPr>
+          <a:xfrm>
+            <a:off x="7520247" y="3221182"/>
+            <a:ext cx="1097280" cy="0"/>
+          </a:xfrm>
+          <a:prstGeom prst="line">
+            <a:avLst/>
+          </a:prstGeom>
+          <a:ln w="5080">
+            <a:solidFill>
+              <a:srgbClr val="FFFFFF"/>
+            </a:solidFill>
+          </a:ln>
+          <a:effectLst/>
+        </p:spPr>
+        <p:style>
+          <a:lnRef idx="2">
+            <a:schemeClr val="accent1"/>
+          </a:lnRef>
+          <a:fillRef idx="0">
+            <a:schemeClr val="accent1"/>
+          </a:fillRef>
+          <a:effectRef idx="1">
+            <a:schemeClr val="accent1"/>
+          </a:effectRef>
+          <a:fontRef idx="minor">
+            <a:schemeClr val="tx1"/>
+          </a:fontRef>
+        </p:style>
+      </p:cxnSp>
+      <p:cxnSp>
+        <p:nvCxnSpPr>
+          <p:cNvPr id="57" name="Connector 56"/>
+          <p:cNvCxnSpPr/>
+          <p:nvPr/>
+        </p:nvCxnSpPr>
+        <p:spPr>
+          <a:xfrm>
+            <a:off x="7520247" y="3312622"/>
+            <a:ext cx="1097280" cy="0"/>
+          </a:xfrm>
+          <a:prstGeom prst="line">
+            <a:avLst/>
+          </a:prstGeom>
+          <a:ln w="5080">
+            <a:solidFill>
+              <a:srgbClr val="FFFFFF"/>
+            </a:solidFill>
+          </a:ln>
+          <a:effectLst/>
+        </p:spPr>
+        <p:style>
+          <a:lnRef idx="2">
+            <a:schemeClr val="accent1"/>
+          </a:lnRef>
+          <a:fillRef idx="0">
+            <a:schemeClr val="accent1"/>
+          </a:fillRef>
+          <a:effectRef idx="1">
+            <a:schemeClr val="accent1"/>
+          </a:effectRef>
+          <a:fontRef idx="minor">
+            <a:schemeClr val="tx1"/>
+          </a:fontRef>
+        </p:style>
+      </p:cxnSp>
+      <p:cxnSp>
+        <p:nvCxnSpPr>
+          <p:cNvPr id="58" name="Connector 57"/>
+          <p:cNvCxnSpPr/>
+          <p:nvPr/>
+        </p:nvCxnSpPr>
+        <p:spPr>
+          <a:xfrm>
+            <a:off x="7520247" y="3404062"/>
+            <a:ext cx="1097280" cy="0"/>
+          </a:xfrm>
+          <a:prstGeom prst="line">
+            <a:avLst/>
+          </a:prstGeom>
+          <a:ln w="5080">
+            <a:solidFill>
+              <a:srgbClr val="FFFFFF"/>
+            </a:solidFill>
+          </a:ln>
+          <a:effectLst/>
+        </p:spPr>
+        <p:style>
+          <a:lnRef idx="2">
+            <a:schemeClr val="accent1"/>
+          </a:lnRef>
+          <a:fillRef idx="0">
+            <a:schemeClr val="accent1"/>
+          </a:fillRef>
+          <a:effectRef idx="1">
+            <a:schemeClr val="accent1"/>
+          </a:effectRef>
+          <a:fontRef idx="minor">
+            <a:schemeClr val="tx1"/>
+          </a:fontRef>
+        </p:style>
+      </p:cxnSp>
+      <p:cxnSp>
+        <p:nvCxnSpPr>
+          <p:cNvPr id="59" name="Connector 58"/>
+          <p:cNvCxnSpPr/>
+          <p:nvPr/>
+        </p:nvCxnSpPr>
+        <p:spPr>
+          <a:xfrm>
+            <a:off x="7520247" y="3495502"/>
+            <a:ext cx="1097280" cy="0"/>
+          </a:xfrm>
+          <a:prstGeom prst="line">
+            <a:avLst/>
+          </a:prstGeom>
+          <a:ln w="5080">
+            <a:solidFill>
+              <a:srgbClr val="FFFFFF"/>
+            </a:solidFill>
+          </a:ln>
+          <a:effectLst/>
+        </p:spPr>
+        <p:style>
+          <a:lnRef idx="2">
+            <a:schemeClr val="accent1"/>
+          </a:lnRef>
+          <a:fillRef idx="0">
+            <a:schemeClr val="accent1"/>
+          </a:fillRef>
+          <a:effectRef idx="1">
+            <a:schemeClr val="accent1"/>
+          </a:effectRef>
+          <a:fontRef idx="minor">
+            <a:schemeClr val="tx1"/>
+          </a:fontRef>
+        </p:style>
+      </p:cxnSp>
+      <p:cxnSp>
+        <p:nvCxnSpPr>
+          <p:cNvPr id="60" name="Connector 59"/>
+          <p:cNvCxnSpPr/>
+          <p:nvPr/>
+        </p:nvCxnSpPr>
+        <p:spPr>
+          <a:xfrm>
+            <a:off x="7520247" y="3586942"/>
+            <a:ext cx="1097280" cy="0"/>
+          </a:xfrm>
+          <a:prstGeom prst="line">
+            <a:avLst/>
+          </a:prstGeom>
+          <a:ln w="5080">
+            <a:solidFill>
+              <a:srgbClr val="FFFFFF"/>
+            </a:solidFill>
+          </a:ln>
+          <a:effectLst/>
+        </p:spPr>
+        <p:style>
+          <a:lnRef idx="2">
+            <a:schemeClr val="accent1"/>
+          </a:lnRef>
+          <a:fillRef idx="0">
+            <a:schemeClr val="accent1"/>
+          </a:fillRef>
+          <a:effectRef idx="1">
+            <a:schemeClr val="accent1"/>
+          </a:effectRef>
+          <a:fontRef idx="minor">
+            <a:schemeClr val="tx1"/>
+          </a:fontRef>
+        </p:style>
+      </p:cxnSp>
+      <p:cxnSp>
+        <p:nvCxnSpPr>
+          <p:cNvPr id="61" name="Connector 60"/>
+          <p:cNvCxnSpPr/>
+          <p:nvPr/>
+        </p:nvCxnSpPr>
+        <p:spPr>
+          <a:xfrm>
+            <a:off x="7520247" y="3678382"/>
+            <a:ext cx="1097280" cy="0"/>
+          </a:xfrm>
+          <a:prstGeom prst="line">
+            <a:avLst/>
+          </a:prstGeom>
+          <a:ln w="5080">
+            <a:solidFill>
+              <a:srgbClr val="FFFFFF"/>
+            </a:solidFill>
+          </a:ln>
+          <a:effectLst/>
+        </p:spPr>
+        <p:style>
+          <a:lnRef idx="2">
+            <a:schemeClr val="accent1"/>
+          </a:lnRef>
+          <a:fillRef idx="0">
+            <a:schemeClr val="accent1"/>
+          </a:fillRef>
+          <a:effectRef idx="1">
+            <a:schemeClr val="accent1"/>
+          </a:effectRef>
+          <a:fontRef idx="minor">
+            <a:schemeClr val="tx1"/>
+          </a:fontRef>
+        </p:style>
+      </p:cxnSp>
+      <p:cxnSp>
+        <p:nvCxnSpPr>
+          <p:cNvPr id="62" name="Connector 61"/>
+          <p:cNvCxnSpPr/>
+          <p:nvPr/>
+        </p:nvCxnSpPr>
+        <p:spPr>
+          <a:xfrm>
+            <a:off x="7520247" y="3769822"/>
+            <a:ext cx="1097280" cy="0"/>
+          </a:xfrm>
+          <a:prstGeom prst="line">
+            <a:avLst/>
+          </a:prstGeom>
+          <a:ln w="5080">
+            <a:solidFill>
+              <a:srgbClr val="FFFFFF"/>
+            </a:solidFill>
+          </a:ln>
+          <a:effectLst/>
+        </p:spPr>
+        <p:style>
+          <a:lnRef idx="2">
+            <a:schemeClr val="accent1"/>
+          </a:lnRef>
+          <a:fillRef idx="0">
+            <a:schemeClr val="accent1"/>
+          </a:fillRef>
+          <a:effectRef idx="1">
+            <a:schemeClr val="accent1"/>
+          </a:effectRef>
+          <a:fontRef idx="minor">
+            <a:schemeClr val="tx1"/>
+          </a:fontRef>
+        </p:style>
+      </p:cxnSp>
+      <p:cxnSp>
+        <p:nvCxnSpPr>
+          <p:cNvPr id="63" name="Connector 62"/>
+          <p:cNvCxnSpPr/>
+          <p:nvPr/>
+        </p:nvCxnSpPr>
+        <p:spPr>
+          <a:xfrm>
+            <a:off x="7520247" y="3861262"/>
+            <a:ext cx="1097280" cy="0"/>
+          </a:xfrm>
+          <a:prstGeom prst="line">
+            <a:avLst/>
+          </a:prstGeom>
+          <a:ln w="5080">
+            <a:solidFill>
+              <a:srgbClr val="FFFFFF"/>
+            </a:solidFill>
+          </a:ln>
+          <a:effectLst/>
+        </p:spPr>
+        <p:style>
+          <a:lnRef idx="2">
+            <a:schemeClr val="accent1"/>
+          </a:lnRef>
+          <a:fillRef idx="0">
+            <a:schemeClr val="accent1"/>
+          </a:fillRef>
+          <a:effectRef idx="1">
+            <a:schemeClr val="accent1"/>
+          </a:effectRef>
+          <a:fontRef idx="minor">
+            <a:schemeClr val="tx1"/>
+          </a:fontRef>
+        </p:style>
+      </p:cxnSp>
+      <p:cxnSp>
+        <p:nvCxnSpPr>
+          <p:cNvPr id="64" name="Connector 63"/>
+          <p:cNvCxnSpPr/>
+          <p:nvPr/>
+        </p:nvCxnSpPr>
+        <p:spPr>
+          <a:xfrm>
+            <a:off x="7520247" y="3952702"/>
+            <a:ext cx="1097280" cy="0"/>
+          </a:xfrm>
+          <a:prstGeom prst="line">
+            <a:avLst/>
+          </a:prstGeom>
+          <a:ln w="5080">
+            <a:solidFill>
+              <a:srgbClr val="FFFFFF"/>
+            </a:solidFill>
+          </a:ln>
+          <a:effectLst/>
+        </p:spPr>
+        <p:style>
+          <a:lnRef idx="2">
+            <a:schemeClr val="accent1"/>
+          </a:lnRef>
+          <a:fillRef idx="0">
+            <a:schemeClr val="accent1"/>
+          </a:fillRef>
+          <a:effectRef idx="1">
+            <a:schemeClr val="accent1"/>
+          </a:effectRef>
+          <a:fontRef idx="minor">
+            <a:schemeClr val="tx1"/>
+          </a:fontRef>
+        </p:style>
+      </p:cxnSp>
+      <p:cxnSp>
+        <p:nvCxnSpPr>
+          <p:cNvPr id="65" name="Connector 64"/>
+          <p:cNvCxnSpPr/>
+          <p:nvPr/>
+        </p:nvCxnSpPr>
+        <p:spPr>
+          <a:xfrm>
+            <a:off x="7520247" y="4044142"/>
+            <a:ext cx="1097280" cy="0"/>
+          </a:xfrm>
+          <a:prstGeom prst="line">
+            <a:avLst/>
+          </a:prstGeom>
+          <a:ln w="5080">
+            <a:solidFill>
+              <a:srgbClr val="FFFFFF"/>
+            </a:solidFill>
+          </a:ln>
+          <a:effectLst/>
+        </p:spPr>
+        <p:style>
+          <a:lnRef idx="2">
+            <a:schemeClr val="accent1"/>
+          </a:lnRef>
+          <a:fillRef idx="0">
+            <a:schemeClr val="accent1"/>
+          </a:fillRef>
+          <a:effectRef idx="1">
+            <a:schemeClr val="accent1"/>
+          </a:effectRef>
+          <a:fontRef idx="minor">
+            <a:schemeClr val="tx1"/>
+          </a:fontRef>
+        </p:style>
+      </p:cxnSp>
+      <p:cxnSp>
+        <p:nvCxnSpPr>
+          <p:cNvPr id="66" name="Connector 65"/>
+          <p:cNvCxnSpPr/>
+          <p:nvPr/>
+        </p:nvCxnSpPr>
+        <p:spPr>
+          <a:xfrm>
+            <a:off x="7520247" y="4135582"/>
+            <a:ext cx="1097280" cy="0"/>
+          </a:xfrm>
+          <a:prstGeom prst="line">
+            <a:avLst/>
+          </a:prstGeom>
+          <a:ln w="5080">
+            <a:solidFill>
+              <a:srgbClr val="FFFFFF"/>
+            </a:solidFill>
+          </a:ln>
+          <a:effectLst/>
+        </p:spPr>
+        <p:style>
+          <a:lnRef idx="2">
+            <a:schemeClr val="accent1"/>
+          </a:lnRef>
+          <a:fillRef idx="0">
+            <a:schemeClr val="accent1"/>
+          </a:fillRef>
+          <a:effectRef idx="1">
+            <a:schemeClr val="accent1"/>
+          </a:effectRef>
+          <a:fontRef idx="minor">
+            <a:schemeClr val="tx1"/>
+          </a:fontRef>
+        </p:style>
+      </p:cxnSp>
+      <p:cxnSp>
+        <p:nvCxnSpPr>
+          <p:cNvPr id="67" name="Connector 66"/>
+          <p:cNvCxnSpPr/>
+          <p:nvPr/>
+        </p:nvCxnSpPr>
+        <p:spPr>
+          <a:xfrm>
+            <a:off x="7520247" y="4227022"/>
+            <a:ext cx="1097280" cy="0"/>
+          </a:xfrm>
+          <a:prstGeom prst="line">
+            <a:avLst/>
+          </a:prstGeom>
+          <a:ln w="5080">
+            <a:solidFill>
+              <a:srgbClr val="FFFFFF"/>
+            </a:solidFill>
+          </a:ln>
+          <a:effectLst/>
+        </p:spPr>
+        <p:style>
+          <a:lnRef idx="2">
+            <a:schemeClr val="accent1"/>
+          </a:lnRef>
+          <a:fillRef idx="0">
+            <a:schemeClr val="accent1"/>
+          </a:fillRef>
+          <a:effectRef idx="1">
+            <a:schemeClr val="accent1"/>
+          </a:effectRef>
+          <a:fontRef idx="minor">
+            <a:schemeClr val="tx1"/>
+          </a:fontRef>
+        </p:style>
+      </p:cxnSp>
+      <p:cxnSp>
+        <p:nvCxnSpPr>
+          <p:cNvPr id="68" name="Connector 67"/>
+          <p:cNvCxnSpPr/>
+          <p:nvPr/>
+        </p:nvCxnSpPr>
+        <p:spPr>
+          <a:xfrm>
+            <a:off x="7520247" y="4318462"/>
+            <a:ext cx="1097280" cy="0"/>
+          </a:xfrm>
+          <a:prstGeom prst="line">
+            <a:avLst/>
+          </a:prstGeom>
+          <a:ln w="5080">
+            <a:solidFill>
+              <a:srgbClr val="FFFFFF"/>
+            </a:solidFill>
+          </a:ln>
+          <a:effectLst/>
+        </p:spPr>
+        <p:style>
+          <a:lnRef idx="2">
+            <a:schemeClr val="accent1"/>
+          </a:lnRef>
+          <a:fillRef idx="0">
+            <a:schemeClr val="accent1"/>
+          </a:fillRef>
+          <a:effectRef idx="1">
+            <a:schemeClr val="accent1"/>
+          </a:effectRef>
+          <a:fontRef idx="minor">
+            <a:schemeClr val="tx1"/>
+          </a:fontRef>
+        </p:style>
+      </p:cxnSp>
+      <p:cxnSp>
+        <p:nvCxnSpPr>
+          <p:cNvPr id="69" name="Connector 68"/>
+          <p:cNvCxnSpPr/>
+          <p:nvPr/>
+        </p:nvCxnSpPr>
+        <p:spPr>
+          <a:xfrm>
+            <a:off x="7520247" y="4409902"/>
+            <a:ext cx="1097280" cy="0"/>
+          </a:xfrm>
+          <a:prstGeom prst="line">
+            <a:avLst/>
+          </a:prstGeom>
+          <a:ln w="5080">
+            <a:solidFill>
+              <a:srgbClr val="FFFFFF"/>
+            </a:solidFill>
+          </a:ln>
+          <a:effectLst/>
+        </p:spPr>
+        <p:style>
+          <a:lnRef idx="2">
+            <a:schemeClr val="accent1"/>
+          </a:lnRef>
+          <a:fillRef idx="0">
+            <a:schemeClr val="accent1"/>
+          </a:fillRef>
+          <a:effectRef idx="1">
+            <a:schemeClr val="accent1"/>
+          </a:effectRef>
+          <a:fontRef idx="minor">
+            <a:schemeClr val="tx1"/>
+          </a:fontRef>
+        </p:style>
+      </p:cxnSp>
+      <p:cxnSp>
+        <p:nvCxnSpPr>
+          <p:cNvPr id="70" name="Connector 69"/>
+          <p:cNvCxnSpPr/>
+          <p:nvPr/>
+        </p:nvCxnSpPr>
+        <p:spPr>
+          <a:xfrm>
+            <a:off x="7520247" y="4501342"/>
+            <a:ext cx="1097280" cy="0"/>
+          </a:xfrm>
+          <a:prstGeom prst="line">
+            <a:avLst/>
+          </a:prstGeom>
+          <a:ln w="5080">
+            <a:solidFill>
+              <a:srgbClr val="FFFFFF"/>
+            </a:solidFill>
+          </a:ln>
+          <a:effectLst/>
+        </p:spPr>
+        <p:style>
+          <a:lnRef idx="2">
+            <a:schemeClr val="accent1"/>
+          </a:lnRef>
+          <a:fillRef idx="0">
+            <a:schemeClr val="accent1"/>
+          </a:fillRef>
+          <a:effectRef idx="1">
+            <a:schemeClr val="accent1"/>
+          </a:effectRef>
+          <a:fontRef idx="minor">
+            <a:schemeClr val="tx1"/>
+          </a:fontRef>
+        </p:style>
+      </p:cxnSp>
+      <p:cxnSp>
+        <p:nvCxnSpPr>
+          <p:cNvPr id="71" name="Connector 70"/>
+          <p:cNvCxnSpPr/>
+          <p:nvPr/>
+        </p:nvCxnSpPr>
+        <p:spPr>
+          <a:xfrm>
+            <a:off x="7520247" y="4592782"/>
+            <a:ext cx="1097280" cy="0"/>
+          </a:xfrm>
+          <a:prstGeom prst="line">
+            <a:avLst/>
+          </a:prstGeom>
+          <a:ln w="5080">
+            <a:solidFill>
+              <a:srgbClr val="FFFFFF"/>
+            </a:solidFill>
+          </a:ln>
+          <a:effectLst/>
+        </p:spPr>
+        <p:style>
+          <a:lnRef idx="2">
+            <a:schemeClr val="accent1"/>
+          </a:lnRef>
+          <a:fillRef idx="0">
+            <a:schemeClr val="accent1"/>
+          </a:fillRef>
+          <a:effectRef idx="1">
+            <a:schemeClr val="accent1"/>
+          </a:effectRef>
+          <a:fontRef idx="minor">
+            <a:schemeClr val="tx1"/>
+          </a:fontRef>
+        </p:style>
+      </p:cxnSp>
+      <p:cxnSp>
+        <p:nvCxnSpPr>
+          <p:cNvPr id="72" name="Connector 71"/>
+          <p:cNvCxnSpPr/>
+          <p:nvPr/>
+        </p:nvCxnSpPr>
+        <p:spPr>
+          <a:xfrm>
+            <a:off x="7520247" y="4684222"/>
+            <a:ext cx="1097280" cy="0"/>
+          </a:xfrm>
+          <a:prstGeom prst="line">
+            <a:avLst/>
+          </a:prstGeom>
+          <a:ln w="5080">
+            <a:solidFill>
+              <a:srgbClr val="FFFFFF"/>
+            </a:solidFill>
+          </a:ln>
+          <a:effectLst/>
+        </p:spPr>
+        <p:style>
+          <a:lnRef idx="2">
+            <a:schemeClr val="accent1"/>
+          </a:lnRef>
+          <a:fillRef idx="0">
+            <a:schemeClr val="accent1"/>
+          </a:fillRef>
+          <a:effectRef idx="1">
+            <a:schemeClr val="accent1"/>
+          </a:effectRef>
+          <a:fontRef idx="minor">
+            <a:schemeClr val="tx1"/>
+          </a:fontRef>
+        </p:style>
+      </p:cxnSp>
+      <p:cxnSp>
+        <p:nvCxnSpPr>
+          <p:cNvPr id="73" name="Connector 72"/>
+          <p:cNvCxnSpPr/>
+          <p:nvPr/>
+        </p:nvCxnSpPr>
+        <p:spPr>
+          <a:xfrm>
+            <a:off x="7520247" y="4775662"/>
+            <a:ext cx="1097280" cy="0"/>
+          </a:xfrm>
+          <a:prstGeom prst="line">
+            <a:avLst/>
+          </a:prstGeom>
+          <a:ln w="5080">
+            <a:solidFill>
+              <a:srgbClr val="FFFFFF"/>
+            </a:solidFill>
+          </a:ln>
+          <a:effectLst/>
+        </p:spPr>
+        <p:style>
+          <a:lnRef idx="2">
+            <a:schemeClr val="accent1"/>
+          </a:lnRef>
+          <a:fillRef idx="0">
+            <a:schemeClr val="accent1"/>
+          </a:fillRef>
+          <a:effectRef idx="1">
+            <a:schemeClr val="accent1"/>
+          </a:effectRef>
+          <a:fontRef idx="minor">
+            <a:schemeClr val="tx1"/>
+          </a:fontRef>
+        </p:style>
+      </p:cxnSp>
+      <p:cxnSp>
+        <p:nvCxnSpPr>
+          <p:cNvPr id="74" name="Connector 73"/>
+          <p:cNvCxnSpPr/>
+          <p:nvPr/>
+        </p:nvCxnSpPr>
+        <p:spPr>
+          <a:xfrm>
+            <a:off x="7520247" y="4867102"/>
+            <a:ext cx="1097280" cy="0"/>
+          </a:xfrm>
+          <a:prstGeom prst="line">
+            <a:avLst/>
+          </a:prstGeom>
+          <a:ln w="5080">
+            <a:solidFill>
+              <a:srgbClr val="FFFFFF"/>
+            </a:solidFill>
+          </a:ln>
+          <a:effectLst/>
+        </p:spPr>
+        <p:style>
+          <a:lnRef idx="2">
+            <a:schemeClr val="accent1"/>
+          </a:lnRef>
+          <a:fillRef idx="0">
+            <a:schemeClr val="accent1"/>
+          </a:fillRef>
+          <a:effectRef idx="1">
+            <a:schemeClr val="accent1"/>
+          </a:effectRef>
+          <a:fontRef idx="minor">
+            <a:schemeClr val="tx1"/>
+          </a:fontRef>
+        </p:style>
+      </p:cxnSp>
+      <p:sp>
+        <p:nvSpPr>
+          <p:cNvPr id="75" name="Rectangle 74"/>
+          <p:cNvSpPr/>
+          <p:nvPr/>
+        </p:nvSpPr>
+        <p:spPr>
+          <a:xfrm>
+            <a:off x="7520247" y="1770611"/>
+            <a:ext cx="1097280" cy="810491"/>
+          </a:xfrm>
+          <a:prstGeom prst="rect">
+            <a:avLst/>
+          </a:prstGeom>
+          <a:solidFill>
+            <a:srgbClr val="C564A1"/>
+          </a:solidFill>
+          <a:ln>
+            <a:noFill/>
+          </a:ln>
+          <a:effectLst/>
+        </p:spPr>
+        <p:style>
+          <a:lnRef idx="1">
+            <a:schemeClr val="accent1"/>
+          </a:lnRef>
+          <a:fillRef idx="3">
+            <a:schemeClr val="accent1"/>
+          </a:fillRef>
+          <a:effectRef idx="2">
+            <a:schemeClr val="accent1"/>
+          </a:effectRef>
+          <a:fontRef idx="minor">
+            <a:schemeClr val="lt1"/>
+          </a:fontRef>
+        </p:style>
+        <p:txBody>
+          <a:bodyPr rtlCol="0" anchor="ctr"/>
+          <a:lstStyle/>
+          <a:p>
+            <a:pPr algn="ctr"/>
+          </a:p>
+        </p:txBody>
+      </p:sp>
+      <p:cxnSp>
+        <p:nvCxnSpPr>
+          <p:cNvPr id="76" name="Connector 75"/>
+          <p:cNvCxnSpPr/>
+          <p:nvPr/>
+        </p:nvCxnSpPr>
+        <p:spPr>
+          <a:xfrm>
+            <a:off x="7520247" y="1770611"/>
+            <a:ext cx="1097280" cy="0"/>
+          </a:xfrm>
+          <a:prstGeom prst="line">
+            <a:avLst/>
+          </a:prstGeom>
+          <a:ln w="5080">
+            <a:solidFill>
+              <a:srgbClr val="FFFFFF"/>
+            </a:solidFill>
+          </a:ln>
+          <a:effectLst/>
+        </p:spPr>
+        <p:style>
+          <a:lnRef idx="2">
+            <a:schemeClr val="accent1"/>
+          </a:lnRef>
+          <a:fillRef idx="0">
+            <a:schemeClr val="accent1"/>
+          </a:fillRef>
+          <a:effectRef idx="1">
+            <a:schemeClr val="accent1"/>
+          </a:effectRef>
+          <a:fontRef idx="minor">
+            <a:schemeClr val="tx1"/>
+          </a:fontRef>
+        </p:style>
+      </p:cxnSp>
+      <p:cxnSp>
+        <p:nvCxnSpPr>
+          <p:cNvPr id="77" name="Connector 76"/>
+          <p:cNvCxnSpPr/>
+          <p:nvPr/>
+        </p:nvCxnSpPr>
+        <p:spPr>
+          <a:xfrm>
+            <a:off x="7520247" y="1862051"/>
+            <a:ext cx="1097280" cy="0"/>
+          </a:xfrm>
+          <a:prstGeom prst="line">
+            <a:avLst/>
+          </a:prstGeom>
+          <a:ln w="5080">
+            <a:solidFill>
+              <a:srgbClr val="FFFFFF"/>
+            </a:solidFill>
+          </a:ln>
+          <a:effectLst/>
+        </p:spPr>
+        <p:style>
+          <a:lnRef idx="2">
+            <a:schemeClr val="accent1"/>
+          </a:lnRef>
+          <a:fillRef idx="0">
+            <a:schemeClr val="accent1"/>
+          </a:fillRef>
+          <a:effectRef idx="1">
+            <a:schemeClr val="accent1"/>
+          </a:effectRef>
+          <a:fontRef idx="minor">
+            <a:schemeClr val="tx1"/>
+          </a:fontRef>
+        </p:style>
+      </p:cxnSp>
+      <p:cxnSp>
+        <p:nvCxnSpPr>
+          <p:cNvPr id="78" name="Connector 77"/>
+          <p:cNvCxnSpPr/>
+          <p:nvPr/>
+        </p:nvCxnSpPr>
+        <p:spPr>
+          <a:xfrm>
+            <a:off x="7520247" y="1953491"/>
+            <a:ext cx="1097280" cy="0"/>
+          </a:xfrm>
+          <a:prstGeom prst="line">
+            <a:avLst/>
+          </a:prstGeom>
+          <a:ln w="5080">
+            <a:solidFill>
+              <a:srgbClr val="FFFFFF"/>
+            </a:solidFill>
+          </a:ln>
+          <a:effectLst/>
+        </p:spPr>
+        <p:style>
+          <a:lnRef idx="2">
+            <a:schemeClr val="accent1"/>
+          </a:lnRef>
+          <a:fillRef idx="0">
+            <a:schemeClr val="accent1"/>
+          </a:fillRef>
+          <a:effectRef idx="1">
+            <a:schemeClr val="accent1"/>
+          </a:effectRef>
+          <a:fontRef idx="minor">
+            <a:schemeClr val="tx1"/>
+          </a:fontRef>
+        </p:style>
+      </p:cxnSp>
+      <p:cxnSp>
+        <p:nvCxnSpPr>
+          <p:cNvPr id="79" name="Connector 78"/>
+          <p:cNvCxnSpPr/>
+          <p:nvPr/>
+        </p:nvCxnSpPr>
+        <p:spPr>
+          <a:xfrm>
+            <a:off x="7520247" y="2044931"/>
+            <a:ext cx="1097280" cy="0"/>
+          </a:xfrm>
+          <a:prstGeom prst="line">
+            <a:avLst/>
+          </a:prstGeom>
+          <a:ln w="5080">
+            <a:solidFill>
+              <a:srgbClr val="FFFFFF"/>
+            </a:solidFill>
+          </a:ln>
+          <a:effectLst/>
+        </p:spPr>
+        <p:style>
+          <a:lnRef idx="2">
+            <a:schemeClr val="accent1"/>
+          </a:lnRef>
+          <a:fillRef idx="0">
+            <a:schemeClr val="accent1"/>
+          </a:fillRef>
+          <a:effectRef idx="1">
+            <a:schemeClr val="accent1"/>
+          </a:effectRef>
+          <a:fontRef idx="minor">
+            <a:schemeClr val="tx1"/>
+          </a:fontRef>
+        </p:style>
+      </p:cxnSp>
+      <p:cxnSp>
+        <p:nvCxnSpPr>
+          <p:cNvPr id="80" name="Connector 79"/>
+          <p:cNvCxnSpPr/>
+          <p:nvPr/>
+        </p:nvCxnSpPr>
+        <p:spPr>
+          <a:xfrm>
+            <a:off x="7520247" y="2136371"/>
+            <a:ext cx="1097280" cy="0"/>
+          </a:xfrm>
+          <a:prstGeom prst="line">
+            <a:avLst/>
+          </a:prstGeom>
+          <a:ln w="5080">
+            <a:solidFill>
+              <a:srgbClr val="FFFFFF"/>
+            </a:solidFill>
+          </a:ln>
+          <a:effectLst/>
+        </p:spPr>
+        <p:style>
+          <a:lnRef idx="2">
+            <a:schemeClr val="accent1"/>
+          </a:lnRef>
+          <a:fillRef idx="0">
+            <a:schemeClr val="accent1"/>
+          </a:fillRef>
+          <a:effectRef idx="1">
+            <a:schemeClr val="accent1"/>
+          </a:effectRef>
+          <a:fontRef idx="minor">
+            <a:schemeClr val="tx1"/>
+          </a:fontRef>
+        </p:style>
+      </p:cxnSp>
+      <p:cxnSp>
+        <p:nvCxnSpPr>
+          <p:cNvPr id="81" name="Connector 80"/>
+          <p:cNvCxnSpPr/>
+          <p:nvPr/>
+        </p:nvCxnSpPr>
+        <p:spPr>
+          <a:xfrm>
+            <a:off x="7520247" y="2227811"/>
+            <a:ext cx="1097280" cy="0"/>
+          </a:xfrm>
+          <a:prstGeom prst="line">
+            <a:avLst/>
+          </a:prstGeom>
+          <a:ln w="5080">
+            <a:solidFill>
+              <a:srgbClr val="FFFFFF"/>
+            </a:solidFill>
+          </a:ln>
+          <a:effectLst/>
+        </p:spPr>
+        <p:style>
+          <a:lnRef idx="2">
+            <a:schemeClr val="accent1"/>
+          </a:lnRef>
+          <a:fillRef idx="0">
+            <a:schemeClr val="accent1"/>
+          </a:fillRef>
+          <a:effectRef idx="1">
+            <a:schemeClr val="accent1"/>
+          </a:effectRef>
+          <a:fontRef idx="minor">
+            <a:schemeClr val="tx1"/>
+          </a:fontRef>
+        </p:style>
+      </p:cxnSp>
+      <p:cxnSp>
+        <p:nvCxnSpPr>
+          <p:cNvPr id="82" name="Connector 81"/>
+          <p:cNvCxnSpPr/>
+          <p:nvPr/>
+        </p:nvCxnSpPr>
+        <p:spPr>
+          <a:xfrm>
+            <a:off x="7520247" y="2319251"/>
+            <a:ext cx="1097280" cy="0"/>
+          </a:xfrm>
+          <a:prstGeom prst="line">
+            <a:avLst/>
+          </a:prstGeom>
+          <a:ln w="5080">
+            <a:solidFill>
+              <a:srgbClr val="FFFFFF"/>
+            </a:solidFill>
+          </a:ln>
+          <a:effectLst/>
+        </p:spPr>
+        <p:style>
+          <a:lnRef idx="2">
+            <a:schemeClr val="accent1"/>
+          </a:lnRef>
+          <a:fillRef idx="0">
+            <a:schemeClr val="accent1"/>
+          </a:fillRef>
+          <a:effectRef idx="1">
+            <a:schemeClr val="accent1"/>
+          </a:effectRef>
+          <a:fontRef idx="minor">
+            <a:schemeClr val="tx1"/>
+          </a:fontRef>
+        </p:style>
+      </p:cxnSp>
+      <p:cxnSp>
+        <p:nvCxnSpPr>
+          <p:cNvPr id="83" name="Connector 82"/>
+          <p:cNvCxnSpPr/>
+          <p:nvPr/>
+        </p:nvCxnSpPr>
+        <p:spPr>
+          <a:xfrm>
+            <a:off x="7520247" y="2410691"/>
+            <a:ext cx="1097280" cy="0"/>
+          </a:xfrm>
+          <a:prstGeom prst="line">
+            <a:avLst/>
+          </a:prstGeom>
+          <a:ln w="5080">
+            <a:solidFill>
+              <a:srgbClr val="FFFFFF"/>
+            </a:solidFill>
+          </a:ln>
+          <a:effectLst/>
+        </p:spPr>
+        <p:style>
+          <a:lnRef idx="2">
+            <a:schemeClr val="accent1"/>
+          </a:lnRef>
+          <a:fillRef idx="0">
+            <a:schemeClr val="accent1"/>
+          </a:fillRef>
+          <a:effectRef idx="1">
+            <a:schemeClr val="accent1"/>
+          </a:effectRef>
+          <a:fontRef idx="minor">
+            <a:schemeClr val="tx1"/>
+          </a:fontRef>
+        </p:style>
+      </p:cxnSp>
+      <p:cxnSp>
+        <p:nvCxnSpPr>
+          <p:cNvPr id="84" name="Connector 83"/>
+          <p:cNvCxnSpPr/>
+          <p:nvPr/>
+        </p:nvCxnSpPr>
+        <p:spPr>
+          <a:xfrm>
+            <a:off x="7520247" y="2502131"/>
+            <a:ext cx="1097280" cy="0"/>
+          </a:xfrm>
+          <a:prstGeom prst="line">
+            <a:avLst/>
+          </a:prstGeom>
+          <a:ln w="5080">
+            <a:solidFill>
+              <a:srgbClr val="FFFFFF"/>
+            </a:solidFill>
+          </a:ln>
+          <a:effectLst/>
+        </p:spPr>
+        <p:style>
+          <a:lnRef idx="2">
+            <a:schemeClr val="accent1"/>
+          </a:lnRef>
+          <a:fillRef idx="0">
+            <a:schemeClr val="accent1"/>
+          </a:fillRef>
+          <a:effectRef idx="1">
+            <a:schemeClr val="accent1"/>
+          </a:effectRef>
+          <a:fontRef idx="minor">
+            <a:schemeClr val="tx1"/>
+          </a:fontRef>
+        </p:style>
+      </p:cxnSp>
+      <p:sp>
+        <p:nvSpPr>
+          <p:cNvPr id="85" name="Rectangle 84"/>
+          <p:cNvSpPr/>
+          <p:nvPr/>
+        </p:nvSpPr>
+        <p:spPr>
+          <a:xfrm>
+            <a:off x="7520247" y="336665"/>
+            <a:ext cx="1097280" cy="1433945"/>
+          </a:xfrm>
+          <a:prstGeom prst="rect">
+            <a:avLst/>
+          </a:prstGeom>
+          <a:solidFill>
+            <a:srgbClr val="4EA772"/>
+          </a:solidFill>
+          <a:ln>
+            <a:noFill/>
+          </a:ln>
+          <a:effectLst/>
+        </p:spPr>
+        <p:style>
+          <a:lnRef idx="1">
+            <a:schemeClr val="accent1"/>
+          </a:lnRef>
+          <a:fillRef idx="3">
+            <a:schemeClr val="accent1"/>
+          </a:fillRef>
+          <a:effectRef idx="2">
+            <a:schemeClr val="accent1"/>
+          </a:effectRef>
+          <a:fontRef idx="minor">
+            <a:schemeClr val="lt1"/>
+          </a:fontRef>
+        </p:style>
+        <p:txBody>
+          <a:bodyPr rtlCol="0" anchor="ctr"/>
+          <a:lstStyle/>
+          <a:p>
+            <a:pPr algn="ctr"/>
+          </a:p>
+        </p:txBody>
+      </p:sp>
+      <p:cxnSp>
+        <p:nvCxnSpPr>
+          <p:cNvPr id="86" name="Connector 85"/>
+          <p:cNvCxnSpPr/>
+          <p:nvPr/>
+        </p:nvCxnSpPr>
+        <p:spPr>
+          <a:xfrm>
+            <a:off x="7520247" y="336665"/>
+            <a:ext cx="1097280" cy="0"/>
+          </a:xfrm>
+          <a:prstGeom prst="line">
+            <a:avLst/>
+          </a:prstGeom>
+          <a:ln w="5080">
+            <a:solidFill>
+              <a:srgbClr val="FFFFFF"/>
+            </a:solidFill>
+          </a:ln>
+          <a:effectLst/>
+        </p:spPr>
+        <p:style>
+          <a:lnRef idx="2">
+            <a:schemeClr val="accent1"/>
+          </a:lnRef>
+          <a:fillRef idx="0">
+            <a:schemeClr val="accent1"/>
+          </a:fillRef>
+          <a:effectRef idx="1">
+            <a:schemeClr val="accent1"/>
+          </a:effectRef>
+          <a:fontRef idx="minor">
+            <a:schemeClr val="tx1"/>
+          </a:fontRef>
+        </p:style>
+      </p:cxnSp>
+      <p:cxnSp>
+        <p:nvCxnSpPr>
+          <p:cNvPr id="87" name="Connector 86"/>
+          <p:cNvCxnSpPr/>
+          <p:nvPr/>
+        </p:nvCxnSpPr>
+        <p:spPr>
+          <a:xfrm>
+            <a:off x="7520247" y="428105"/>
+            <a:ext cx="1097280" cy="0"/>
+          </a:xfrm>
+          <a:prstGeom prst="line">
+            <a:avLst/>
+          </a:prstGeom>
+          <a:ln w="5080">
+            <a:solidFill>
+              <a:srgbClr val="FFFFFF"/>
+            </a:solidFill>
+          </a:ln>
+          <a:effectLst/>
+        </p:spPr>
+        <p:style>
+          <a:lnRef idx="2">
+            <a:schemeClr val="accent1"/>
+          </a:lnRef>
+          <a:fillRef idx="0">
+            <a:schemeClr val="accent1"/>
+          </a:fillRef>
+          <a:effectRef idx="1">
+            <a:schemeClr val="accent1"/>
+          </a:effectRef>
+          <a:fontRef idx="minor">
+            <a:schemeClr val="tx1"/>
+          </a:fontRef>
+        </p:style>
+      </p:cxnSp>
+      <p:cxnSp>
+        <p:nvCxnSpPr>
+          <p:cNvPr id="88" name="Connector 87"/>
+          <p:cNvCxnSpPr/>
+          <p:nvPr/>
+        </p:nvCxnSpPr>
+        <p:spPr>
+          <a:xfrm>
+            <a:off x="7520247" y="519545"/>
+            <a:ext cx="1097280" cy="0"/>
+          </a:xfrm>
+          <a:prstGeom prst="line">
+            <a:avLst/>
+          </a:prstGeom>
+          <a:ln w="5080">
+            <a:solidFill>
+              <a:srgbClr val="FFFFFF"/>
+            </a:solidFill>
+          </a:ln>
+          <a:effectLst/>
+        </p:spPr>
+        <p:style>
+          <a:lnRef idx="2">
+            <a:schemeClr val="accent1"/>
+          </a:lnRef>
+          <a:fillRef idx="0">
+            <a:schemeClr val="accent1"/>
+          </a:fillRef>
+          <a:effectRef idx="1">
+            <a:schemeClr val="accent1"/>
+          </a:effectRef>
+          <a:fontRef idx="minor">
+            <a:schemeClr val="tx1"/>
+          </a:fontRef>
+        </p:style>
+      </p:cxnSp>
+      <p:cxnSp>
+        <p:nvCxnSpPr>
+          <p:cNvPr id="89" name="Connector 88"/>
+          <p:cNvCxnSpPr/>
+          <p:nvPr/>
+        </p:nvCxnSpPr>
+        <p:spPr>
+          <a:xfrm>
+            <a:off x="7520247" y="610985"/>
+            <a:ext cx="1097280" cy="0"/>
+          </a:xfrm>
+          <a:prstGeom prst="line">
+            <a:avLst/>
+          </a:prstGeom>
+          <a:ln w="5080">
+            <a:solidFill>
+              <a:srgbClr val="FFFFFF"/>
+            </a:solidFill>
+          </a:ln>
+          <a:effectLst/>
+        </p:spPr>
+        <p:style>
+          <a:lnRef idx="2">
+            <a:schemeClr val="accent1"/>
+          </a:lnRef>
+          <a:fillRef idx="0">
+            <a:schemeClr val="accent1"/>
+          </a:fillRef>
+          <a:effectRef idx="1">
+            <a:schemeClr val="accent1"/>
+          </a:effectRef>
+          <a:fontRef idx="minor">
+            <a:schemeClr val="tx1"/>
+          </a:fontRef>
+        </p:style>
+      </p:cxnSp>
+      <p:cxnSp>
+        <p:nvCxnSpPr>
+          <p:cNvPr id="90" name="Connector 89"/>
+          <p:cNvCxnSpPr/>
+          <p:nvPr/>
+        </p:nvCxnSpPr>
+        <p:spPr>
+          <a:xfrm>
+            <a:off x="7520247" y="702425"/>
+            <a:ext cx="1097280" cy="0"/>
+          </a:xfrm>
+          <a:prstGeom prst="line">
+            <a:avLst/>
+          </a:prstGeom>
+          <a:ln w="5080">
+            <a:solidFill>
+              <a:srgbClr val="FFFFFF"/>
+            </a:solidFill>
+          </a:ln>
+          <a:effectLst/>
+        </p:spPr>
+        <p:style>
+          <a:lnRef idx="2">
+            <a:schemeClr val="accent1"/>
+          </a:lnRef>
+          <a:fillRef idx="0">
+            <a:schemeClr val="accent1"/>
+          </a:fillRef>
+          <a:effectRef idx="1">
+            <a:schemeClr val="accent1"/>
+          </a:effectRef>
+          <a:fontRef idx="minor">
+            <a:schemeClr val="tx1"/>
+          </a:fontRef>
+        </p:style>
+      </p:cxnSp>
+      <p:cxnSp>
+        <p:nvCxnSpPr>
+          <p:cNvPr id="91" name="Connector 90"/>
+          <p:cNvCxnSpPr/>
+          <p:nvPr/>
+        </p:nvCxnSpPr>
+        <p:spPr>
+          <a:xfrm>
+            <a:off x="7520247" y="793865"/>
+            <a:ext cx="1097280" cy="0"/>
+          </a:xfrm>
+          <a:prstGeom prst="line">
+            <a:avLst/>
+          </a:prstGeom>
+          <a:ln w="5080">
+            <a:solidFill>
+              <a:srgbClr val="FFFFFF"/>
+            </a:solidFill>
+          </a:ln>
+          <a:effectLst/>
+        </p:spPr>
+        <p:style>
+          <a:lnRef idx="2">
+            <a:schemeClr val="accent1"/>
+          </a:lnRef>
+          <a:fillRef idx="0">
+            <a:schemeClr val="accent1"/>
+          </a:fillRef>
+          <a:effectRef idx="1">
+            <a:schemeClr val="accent1"/>
+          </a:effectRef>
+          <a:fontRef idx="minor">
+            <a:schemeClr val="tx1"/>
+          </a:fontRef>
+        </p:style>
+      </p:cxnSp>
+      <p:cxnSp>
+        <p:nvCxnSpPr>
+          <p:cNvPr id="92" name="Connector 91"/>
+          <p:cNvCxnSpPr/>
+          <p:nvPr/>
+        </p:nvCxnSpPr>
+        <p:spPr>
+          <a:xfrm>
+            <a:off x="7520247" y="885305"/>
+            <a:ext cx="1097280" cy="0"/>
+          </a:xfrm>
+          <a:prstGeom prst="line">
+            <a:avLst/>
+          </a:prstGeom>
+          <a:ln w="5080">
+            <a:solidFill>
+              <a:srgbClr val="FFFFFF"/>
+            </a:solidFill>
+          </a:ln>
+          <a:effectLst/>
+        </p:spPr>
+        <p:style>
+          <a:lnRef idx="2">
+            <a:schemeClr val="accent1"/>
+          </a:lnRef>
+          <a:fillRef idx="0">
+            <a:schemeClr val="accent1"/>
+          </a:fillRef>
+          <a:effectRef idx="1">
+            <a:schemeClr val="accent1"/>
+          </a:effectRef>
+          <a:fontRef idx="minor">
+            <a:schemeClr val="tx1"/>
+          </a:fontRef>
+        </p:style>
+      </p:cxnSp>
+      <p:cxnSp>
+        <p:nvCxnSpPr>
+          <p:cNvPr id="93" name="Connector 92"/>
+          <p:cNvCxnSpPr/>
+          <p:nvPr/>
+        </p:nvCxnSpPr>
+        <p:spPr>
+          <a:xfrm>
+            <a:off x="7520247" y="976745"/>
+            <a:ext cx="1097280" cy="0"/>
+          </a:xfrm>
+          <a:prstGeom prst="line">
+            <a:avLst/>
+          </a:prstGeom>
+          <a:ln w="5080">
+            <a:solidFill>
+              <a:srgbClr val="FFFFFF"/>
+            </a:solidFill>
+          </a:ln>
+          <a:effectLst/>
+        </p:spPr>
+        <p:style>
+          <a:lnRef idx="2">
+            <a:schemeClr val="accent1"/>
+          </a:lnRef>
+          <a:fillRef idx="0">
+            <a:schemeClr val="accent1"/>
+          </a:fillRef>
+          <a:effectRef idx="1">
+            <a:schemeClr val="accent1"/>
+          </a:effectRef>
+          <a:fontRef idx="minor">
+            <a:schemeClr val="tx1"/>
+          </a:fontRef>
+        </p:style>
+      </p:cxnSp>
+      <p:cxnSp>
+        <p:nvCxnSpPr>
+          <p:cNvPr id="94" name="Connector 93"/>
+          <p:cNvCxnSpPr/>
+          <p:nvPr/>
+        </p:nvCxnSpPr>
+        <p:spPr>
+          <a:xfrm>
+            <a:off x="7520247" y="1068185"/>
+            <a:ext cx="1097280" cy="0"/>
+          </a:xfrm>
+          <a:prstGeom prst="line">
+            <a:avLst/>
+          </a:prstGeom>
+          <a:ln w="5080">
+            <a:solidFill>
+              <a:srgbClr val="FFFFFF"/>
+            </a:solidFill>
+          </a:ln>
+          <a:effectLst/>
+        </p:spPr>
+        <p:style>
+          <a:lnRef idx="2">
+            <a:schemeClr val="accent1"/>
+          </a:lnRef>
+          <a:fillRef idx="0">
+            <a:schemeClr val="accent1"/>
+          </a:fillRef>
+          <a:effectRef idx="1">
+            <a:schemeClr val="accent1"/>
+          </a:effectRef>
+          <a:fontRef idx="minor">
+            <a:schemeClr val="tx1"/>
+          </a:fontRef>
+        </p:style>
+      </p:cxnSp>
+      <p:cxnSp>
+        <p:nvCxnSpPr>
+          <p:cNvPr id="95" name="Connector 94"/>
+          <p:cNvCxnSpPr/>
+          <p:nvPr/>
+        </p:nvCxnSpPr>
+        <p:spPr>
+          <a:xfrm>
+            <a:off x="7520247" y="1159625"/>
+            <a:ext cx="1097280" cy="0"/>
+          </a:xfrm>
+          <a:prstGeom prst="line">
+            <a:avLst/>
+          </a:prstGeom>
+          <a:ln w="5080">
+            <a:solidFill>
+              <a:srgbClr val="FFFFFF"/>
+            </a:solidFill>
+          </a:ln>
+          <a:effectLst/>
+        </p:spPr>
+        <p:style>
+          <a:lnRef idx="2">
+            <a:schemeClr val="accent1"/>
+          </a:lnRef>
+          <a:fillRef idx="0">
+            <a:schemeClr val="accent1"/>
+          </a:fillRef>
+          <a:effectRef idx="1">
+            <a:schemeClr val="accent1"/>
+          </a:effectRef>
+          <a:fontRef idx="minor">
+            <a:schemeClr val="tx1"/>
+          </a:fontRef>
+        </p:style>
+      </p:cxnSp>
+      <p:cxnSp>
+        <p:nvCxnSpPr>
+          <p:cNvPr id="96" name="Connector 95"/>
+          <p:cNvCxnSpPr/>
+          <p:nvPr/>
+        </p:nvCxnSpPr>
+        <p:spPr>
+          <a:xfrm>
+            <a:off x="7520247" y="1251065"/>
+            <a:ext cx="1097280" cy="0"/>
+          </a:xfrm>
+          <a:prstGeom prst="line">
+            <a:avLst/>
+          </a:prstGeom>
+          <a:ln w="5080">
+            <a:solidFill>
+              <a:srgbClr val="FFFFFF"/>
+            </a:solidFill>
+          </a:ln>
+          <a:effectLst/>
+        </p:spPr>
+        <p:style>
+          <a:lnRef idx="2">
+            <a:schemeClr val="accent1"/>
+          </a:lnRef>
+          <a:fillRef idx="0">
+            <a:schemeClr val="accent1"/>
+          </a:fillRef>
+          <a:effectRef idx="1">
+            <a:schemeClr val="accent1"/>
+          </a:effectRef>
+          <a:fontRef idx="minor">
+            <a:schemeClr val="tx1"/>
+          </a:fontRef>
+        </p:style>
+      </p:cxnSp>
+      <p:cxnSp>
+        <p:nvCxnSpPr>
+          <p:cNvPr id="97" name="Connector 96"/>
+          <p:cNvCxnSpPr/>
+          <p:nvPr/>
+        </p:nvCxnSpPr>
+        <p:spPr>
+          <a:xfrm>
+            <a:off x="7520247" y="1342505"/>
+            <a:ext cx="1097280" cy="0"/>
+          </a:xfrm>
+          <a:prstGeom prst="line">
+            <a:avLst/>
+          </a:prstGeom>
+          <a:ln w="5080">
+            <a:solidFill>
+              <a:srgbClr val="FFFFFF"/>
+            </a:solidFill>
+          </a:ln>
+          <a:effectLst/>
+        </p:spPr>
+        <p:style>
+          <a:lnRef idx="2">
+            <a:schemeClr val="accent1"/>
+          </a:lnRef>
+          <a:fillRef idx="0">
+            <a:schemeClr val="accent1"/>
+          </a:fillRef>
+          <a:effectRef idx="1">
+            <a:schemeClr val="accent1"/>
+          </a:effectRef>
+          <a:fontRef idx="minor">
+            <a:schemeClr val="tx1"/>
+          </a:fontRef>
+        </p:style>
+      </p:cxnSp>
+      <p:cxnSp>
+        <p:nvCxnSpPr>
+          <p:cNvPr id="98" name="Connector 97"/>
+          <p:cNvCxnSpPr/>
+          <p:nvPr/>
+        </p:nvCxnSpPr>
+        <p:spPr>
+          <a:xfrm>
+            <a:off x="7520247" y="1433945"/>
+            <a:ext cx="1097280" cy="0"/>
+          </a:xfrm>
+          <a:prstGeom prst="line">
+            <a:avLst/>
+          </a:prstGeom>
+          <a:ln w="5080">
+            <a:solidFill>
+              <a:srgbClr val="FFFFFF"/>
+            </a:solidFill>
+          </a:ln>
+          <a:effectLst/>
+        </p:spPr>
+        <p:style>
+          <a:lnRef idx="2">
+            <a:schemeClr val="accent1"/>
+          </a:lnRef>
+          <a:fillRef idx="0">
+            <a:schemeClr val="accent1"/>
+          </a:fillRef>
+          <a:effectRef idx="1">
+            <a:schemeClr val="accent1"/>
+          </a:effectRef>
+          <a:fontRef idx="minor">
+            <a:schemeClr val="tx1"/>
+          </a:fontRef>
+        </p:style>
+      </p:cxnSp>
+      <p:cxnSp>
+        <p:nvCxnSpPr>
+          <p:cNvPr id="99" name="Connector 98"/>
+          <p:cNvCxnSpPr/>
+          <p:nvPr/>
+        </p:nvCxnSpPr>
+        <p:spPr>
+          <a:xfrm>
+            <a:off x="7520247" y="1525385"/>
+            <a:ext cx="1097280" cy="0"/>
+          </a:xfrm>
+          <a:prstGeom prst="line">
+            <a:avLst/>
+          </a:prstGeom>
+          <a:ln w="5080">
+            <a:solidFill>
+              <a:srgbClr val="FFFFFF"/>
+            </a:solidFill>
+          </a:ln>
+          <a:effectLst/>
+        </p:spPr>
+        <p:style>
+          <a:lnRef idx="2">
+            <a:schemeClr val="accent1"/>
+          </a:lnRef>
+          <a:fillRef idx="0">
+            <a:schemeClr val="accent1"/>
+          </a:fillRef>
+          <a:effectRef idx="1">
+            <a:schemeClr val="accent1"/>
+          </a:effectRef>
+          <a:fontRef idx="minor">
+            <a:schemeClr val="tx1"/>
+          </a:fontRef>
+        </p:style>
+      </p:cxnSp>
+      <p:cxnSp>
+        <p:nvCxnSpPr>
+          <p:cNvPr id="100" name="Connector 99"/>
+          <p:cNvCxnSpPr/>
+          <p:nvPr/>
+        </p:nvCxnSpPr>
+        <p:spPr>
+          <a:xfrm>
+            <a:off x="7520247" y="1616825"/>
+            <a:ext cx="1097280" cy="0"/>
+          </a:xfrm>
+          <a:prstGeom prst="line">
+            <a:avLst/>
+          </a:prstGeom>
+          <a:ln w="5080">
+            <a:solidFill>
+              <a:srgbClr val="FFFFFF"/>
+            </a:solidFill>
+          </a:ln>
+          <a:effectLst/>
+        </p:spPr>
+        <p:style>
+          <a:lnRef idx="2">
+            <a:schemeClr val="accent1"/>
+          </a:lnRef>
+          <a:fillRef idx="0">
+            <a:schemeClr val="accent1"/>
+          </a:fillRef>
+          <a:effectRef idx="1">
+            <a:schemeClr val="accent1"/>
+          </a:effectRef>
+          <a:fontRef idx="minor">
+            <a:schemeClr val="tx1"/>
+          </a:fontRef>
+        </p:style>
+      </p:cxnSp>
+      <p:cxnSp>
+        <p:nvCxnSpPr>
+          <p:cNvPr id="101" name="Connector 100"/>
+          <p:cNvCxnSpPr/>
+          <p:nvPr/>
+        </p:nvCxnSpPr>
+        <p:spPr>
+          <a:xfrm>
+            <a:off x="7520247" y="1708265"/>
+            <a:ext cx="1097280" cy="0"/>
+          </a:xfrm>
+          <a:prstGeom prst="line">
+            <a:avLst/>
+          </a:prstGeom>
+          <a:ln w="5080">
+            <a:solidFill>
+              <a:srgbClr val="FFFFFF"/>
+            </a:solidFill>
+          </a:ln>
+          <a:effectLst/>
+        </p:spPr>
+        <p:style>
+          <a:lnRef idx="2">
+            <a:schemeClr val="accent1"/>
+          </a:lnRef>
+          <a:fillRef idx="0">
+            <a:schemeClr val="accent1"/>
+          </a:fillRef>
+          <a:effectRef idx="1">
+            <a:schemeClr val="accent1"/>
+          </a:effectRef>
+          <a:fontRef idx="minor">
+            <a:schemeClr val="tx1"/>
+          </a:fontRef>
+        </p:style>
+      </p:cxnSp>
+      <p:sp>
+        <p:nvSpPr>
+          <p:cNvPr id="102" name="TextBox 101"/>
           <p:cNvSpPr txBox="1"/>
           <p:nvPr/>
         </p:nvSpPr>
         <p:spPr>
           <a:xfrm>
-            <a:off x="10058400" y="1097280"/>
+            <a:off x="7520247" y="5833872"/>
+            <a:ext cx="1097280" cy="228600"/>
+          </a:xfrm>
+          <a:prstGeom prst="rect">
+            <a:avLst/>
+          </a:prstGeom>
+          <a:noFill/>
+          <a:effectLst/>
+        </p:spPr>
+        <p:txBody>
+          <a:bodyPr wrap="square" lIns="0" rIns="0" tIns="0" bIns="0" anchor="t">
+            <a:spAutoFit/>
+          </a:bodyPr>
+          <a:lstStyle/>
+          <a:p>
+            <a:pPr algn="ctr"/>
+            <a:r>
+              <a:rPr sz="1000" b="1" i="0">
+                <a:solidFill>
+                  <a:srgbClr val="BBBBBB"/>
+                </a:solidFill>
+                <a:latin typeface="Arial"/>
+              </a:rPr>
+              <a:t>Guinney 2015
+reference</a:t>
+            </a:r>
+          </a:p>
+        </p:txBody>
+      </p:sp>
+      <p:sp>
+        <p:nvSpPr>
+          <p:cNvPr id="103" name="TextBox 102"/>
+          <p:cNvSpPr txBox="1"/>
+          <p:nvPr/>
+        </p:nvSpPr>
+        <p:spPr>
+          <a:xfrm>
+            <a:off x="10241280" y="1097280"/>
             <a:ext cx="1645920" cy="228600"/>
           </a:xfrm>
           <a:prstGeom prst="rect">
@@ -4466,13 +6875,13 @@
       </p:sp>
       <p:sp>
         <p:nvSpPr>
-          <p:cNvPr id="38" name="Rectangle 37"/>
+          <p:cNvPr id="104" name="Rectangle 103"/>
           <p:cNvSpPr/>
           <p:nvPr/>
         </p:nvSpPr>
         <p:spPr>
           <a:xfrm>
-            <a:off x="10058400" y="1371600"/>
+            <a:off x="10241280" y="1371600"/>
             <a:ext cx="201168" cy="164592"/>
           </a:xfrm>
           <a:prstGeom prst="rect">
@@ -4510,13 +6919,13 @@
       </p:sp>
       <p:sp>
         <p:nvSpPr>
-          <p:cNvPr id="39" name="TextBox 38"/>
+          <p:cNvPr id="105" name="TextBox 104"/>
           <p:cNvSpPr txBox="1"/>
           <p:nvPr/>
         </p:nvSpPr>
         <p:spPr>
           <a:xfrm>
-            <a:off x="10314432" y="1353312"/>
+            <a:off x="10497312" y="1353312"/>
             <a:ext cx="1097280" cy="201168"/>
           </a:xfrm>
           <a:prstGeom prst="rect">
@@ -4546,13 +6955,13 @@
       </p:sp>
       <p:sp>
         <p:nvSpPr>
-          <p:cNvPr id="40" name="Rectangle 39"/>
+          <p:cNvPr id="106" name="Rectangle 105"/>
           <p:cNvSpPr/>
           <p:nvPr/>
         </p:nvSpPr>
         <p:spPr>
           <a:xfrm>
-            <a:off x="10058400" y="1645920"/>
+            <a:off x="10241280" y="1645920"/>
             <a:ext cx="201168" cy="164592"/>
           </a:xfrm>
           <a:prstGeom prst="rect">
@@ -4590,13 +6999,13 @@
       </p:sp>
       <p:sp>
         <p:nvSpPr>
-          <p:cNvPr id="41" name="TextBox 40"/>
+          <p:cNvPr id="107" name="TextBox 106"/>
           <p:cNvSpPr txBox="1"/>
           <p:nvPr/>
         </p:nvSpPr>
         <p:spPr>
           <a:xfrm>
-            <a:off x="10314432" y="1627632"/>
+            <a:off x="10497312" y="1627631"/>
             <a:ext cx="1097280" cy="201168"/>
           </a:xfrm>
           <a:prstGeom prst="rect">
@@ -4626,13 +7035,13 @@
       </p:sp>
       <p:sp>
         <p:nvSpPr>
-          <p:cNvPr id="42" name="Rectangle 41"/>
+          <p:cNvPr id="108" name="Rectangle 107"/>
           <p:cNvSpPr/>
           <p:nvPr/>
         </p:nvSpPr>
         <p:spPr>
           <a:xfrm>
-            <a:off x="10058400" y="1920240"/>
+            <a:off x="10241280" y="1920240"/>
             <a:ext cx="201168" cy="164592"/>
           </a:xfrm>
           <a:prstGeom prst="rect">
@@ -4670,13 +7079,13 @@
       </p:sp>
       <p:sp>
         <p:nvSpPr>
-          <p:cNvPr id="43" name="TextBox 42"/>
+          <p:cNvPr id="109" name="TextBox 108"/>
           <p:cNvSpPr txBox="1"/>
           <p:nvPr/>
         </p:nvSpPr>
         <p:spPr>
           <a:xfrm>
-            <a:off x="10314432" y="1901952"/>
+            <a:off x="10497312" y="1901952"/>
             <a:ext cx="1097280" cy="201168"/>
           </a:xfrm>
           <a:prstGeom prst="rect">
@@ -4706,13 +7115,13 @@
       </p:sp>
       <p:sp>
         <p:nvSpPr>
-          <p:cNvPr id="44" name="Rectangle 43"/>
+          <p:cNvPr id="110" name="Rectangle 109"/>
           <p:cNvSpPr/>
           <p:nvPr/>
         </p:nvSpPr>
         <p:spPr>
           <a:xfrm>
-            <a:off x="10058400" y="2194559"/>
+            <a:off x="10241280" y="2194559"/>
             <a:ext cx="201168" cy="164592"/>
           </a:xfrm>
           <a:prstGeom prst="rect">
@@ -4750,13 +7159,13 @@
       </p:sp>
       <p:sp>
         <p:nvSpPr>
-          <p:cNvPr id="45" name="TextBox 44"/>
+          <p:cNvPr id="111" name="TextBox 110"/>
           <p:cNvSpPr txBox="1"/>
           <p:nvPr/>
         </p:nvSpPr>
         <p:spPr>
           <a:xfrm>
-            <a:off x="10314432" y="2176271"/>
+            <a:off x="10497312" y="2176271"/>
             <a:ext cx="1097280" cy="201168"/>
           </a:xfrm>
           <a:prstGeom prst="rect">
@@ -4786,14 +7195,60 @@
       </p:sp>
       <p:sp>
         <p:nvSpPr>
-          <p:cNvPr id="46" name="TextBox 45"/>
+          <p:cNvPr id="112" name="Rectangle 111"/>
+          <p:cNvSpPr/>
+          <p:nvPr/>
+        </p:nvSpPr>
+        <p:spPr>
+          <a:xfrm>
+            <a:off x="2286000" y="822960"/>
+            <a:ext cx="7772400" cy="274320"/>
+          </a:xfrm>
+          <a:prstGeom prst="rect">
+            <a:avLst/>
+          </a:prstGeom>
+          <a:solidFill>
+            <a:srgbClr val="F0F0F0"/>
+          </a:solidFill>
+          <a:ln w="10160">
+            <a:solidFill>
+              <a:srgbClr val="222222"/>
+            </a:solidFill>
+          </a:ln>
+          <a:effectLst/>
+        </p:spPr>
+        <p:style>
+          <a:lnRef idx="1">
+            <a:schemeClr val="accent1"/>
+          </a:lnRef>
+          <a:fillRef idx="3">
+            <a:schemeClr val="accent1"/>
+          </a:fillRef>
+          <a:effectRef idx="2">
+            <a:schemeClr val="accent1"/>
+          </a:effectRef>
+          <a:fontRef idx="minor">
+            <a:schemeClr val="lt1"/>
+          </a:fontRef>
+        </p:style>
+        <p:txBody>
+          <a:bodyPr rtlCol="0" anchor="ctr"/>
+          <a:lstStyle/>
+          <a:p>
+            <a:pPr algn="ctr"/>
+          </a:p>
+        </p:txBody>
+      </p:sp>
+      <p:sp>
+        <p:nvSpPr>
+          <p:cNvPr id="113" name="TextBox 112"/>
           <p:cNvSpPr txBox="1"/>
           <p:nvPr/>
         </p:nvSpPr>
         <p:spPr>
           <a:xfrm>
-            <a:off x="2560320" y="6263640"/>
-            <a:ext cx="7315200" cy="320040"/>
+            <a:off x="2286000" y="822960"/>
+            <a:ext cx="7772400" cy="274320"/>
           </a:xfrm>
           <a:prstGeom prst="rect">
             <a:avLst/>
@@ -4807,15 +7262,15 @@
           </a:bodyPr>
           <a:lstStyle/>
           <a:p>
-            <a:pPr algn="l"/>
-            <a:r>
-              <a:rPr sz="900" b="0" i="1">
+            <a:pPr algn="ctr"/>
+            <a:r>
+              <a:rPr sz="900" b="0" i="0">
                 <a:solidFill>
                   <a:srgbClr val="222222"/>
                 </a:solidFill>
                 <a:latin typeface="Arial"/>
               </a:rPr>
-              <a:t>CMS4 (mesenchymal): 3/18 good vs 4/17 bad, Fisher P = 1.0 — CMS call does not differentiate; EMT argument rests on GSEA/ssGSEA (§3.3, Fig 3).</a:t>
+              <a:t>CMS4 (mesenchymal): 3/18 good vs 4/17 bad (Fisher P = 1.0). EMT argument rests on GSEA/ssGSEA, not CMS classifier</a:t>
             </a:r>
           </a:p>
         </p:txBody>
